--- a/output/wordlabs-age-suffix-3day.pptx
+++ b/output/wordlabs-age-suffix-3day.pptx
@@ -4240,7 +4240,7 @@
                 <a:ea typeface="Calibri" pitchFamily="34" charset="-122"/>
                 <a:cs typeface="Calibri" pitchFamily="34" charset="-120"/>
               </a:rPr>
-              <a:t>"state, collection, or process"</a:t>
+              <a:t>"state, process, or collection"</a:t>
             </a:r>
             <a:endParaRPr lang="en-US" sz="2200" dirty="0"/>
           </a:p>
@@ -5288,7 +5288,7 @@
                 <a:ea typeface="Calibri" pitchFamily="34" charset="-122"/>
                 <a:cs typeface="Calibri" pitchFamily="34" charset="-120"/>
               </a:rPr>
-              <a:t>Word Labs  •  wordlabs.app  •  Suffix: '-age' = state, collection, or process</a:t>
+              <a:t>Word Labs  •  wordlabs.app  •  Suffix: '-age' = state, process, or collection</a:t>
             </a:r>
             <a:endParaRPr lang="en-US" sz="800" dirty="0"/>
           </a:p>
@@ -5928,7 +5928,7 @@
                 <a:ea typeface="Calibri" pitchFamily="34" charset="-122"/>
                 <a:cs typeface="Calibri" pitchFamily="34" charset="-120"/>
               </a:rPr>
-              <a:t>Word Labs  •  wordlabs.app  •  Suffix: '-age' = state, collection, or process</a:t>
+              <a:t>Word Labs  •  wordlabs.app  •  Suffix: '-age' = state, process, or collection</a:t>
             </a:r>
             <a:endParaRPr lang="en-US" sz="800" dirty="0"/>
           </a:p>
@@ -6040,7 +6040,7 @@
                 <a:ea typeface="Calibri" pitchFamily="34" charset="-122"/>
                 <a:cs typeface="Calibri" pitchFamily="34" charset="-120"/>
               </a:rPr>
-              <a:t>We wrapped a </a:t>
+              <a:t>The nurse wrapped a </a:t>
             </a:r>
             <a:pPr algn="l" indent="0" marL="0">
               <a:buNone/>
@@ -6071,7 +6071,7 @@
                 <a:ea typeface="Calibri" pitchFamily="34" charset="-122"/>
                 <a:cs typeface="Calibri" pitchFamily="34" charset="-120"/>
               </a:rPr>
-              <a:t> around her arm and put the first-aid kit back in </a:t>
+              <a:t> around his arm after the </a:t>
             </a:r>
             <a:pPr algn="l" indent="0" marL="0">
               <a:buNone/>
@@ -6088,7 +6088,7 @@
                 <a:ea typeface="Calibri" pitchFamily="34" charset="-122"/>
                 <a:cs typeface="Calibri" pitchFamily="34" charset="-120"/>
               </a:rPr>
-              <a:t>storage</a:t>
+              <a:t>shortage</a:t>
             </a:r>
             <a:pPr algn="l" indent="0" marL="0">
               <a:buNone/>
@@ -6102,7 +6102,7 @@
                 <a:ea typeface="Calibri" pitchFamily="34" charset="-122"/>
                 <a:cs typeface="Calibri" pitchFamily="34" charset="-120"/>
               </a:rPr>
-              <a:t>.</a:t>
+              <a:t> of plasters was discovered.</a:t>
             </a:r>
             <a:endParaRPr lang="en-US" sz="1800" dirty="0"/>
           </a:p>
@@ -6385,7 +6385,7 @@
                 <a:ea typeface="Trebuchet MS" pitchFamily="34" charset="-122"/>
                 <a:cs typeface="Trebuchet MS" pitchFamily="34" charset="-120"/>
               </a:rPr>
-              <a:t>storage</a:t>
+              <a:t>shortage</a:t>
             </a:r>
             <a:endParaRPr lang="en-US" sz="1400" dirty="0"/>
           </a:p>
@@ -6716,7 +6716,7 @@
                 <a:ea typeface="Calibri" pitchFamily="34" charset="-122"/>
                 <a:cs typeface="Calibri" pitchFamily="34" charset="-120"/>
               </a:rPr>
-              <a:t>Word Labs  •  wordlabs.app  •  Suffix: '-age' = state, collection, or process</a:t>
+              <a:t>Word Labs  •  wordlabs.app  •  Suffix: '-age' = state, process, or collection</a:t>
             </a:r>
             <a:endParaRPr lang="en-US" sz="800" dirty="0"/>
           </a:p>
@@ -7543,7 +7543,7 @@
                 <a:ea typeface="Calibri" pitchFamily="34" charset="-122"/>
                 <a:cs typeface="Calibri" pitchFamily="34" charset="-120"/>
               </a:rPr>
-              <a:t>Word Labs  •  wordlabs.app  •  Suffix: '-age' = state, collection, or process</a:t>
+              <a:t>Word Labs  •  wordlabs.app  •  Suffix: '-age' = state, process, or collection</a:t>
             </a:r>
             <a:endParaRPr lang="en-US" sz="800" dirty="0"/>
           </a:p>
@@ -7860,7 +7860,7 @@
                 <a:ea typeface="Calibri" pitchFamily="34" charset="-122"/>
                 <a:cs typeface="Calibri" pitchFamily="34" charset="-120"/>
               </a:rPr>
-              <a:t>strip or binding</a:t>
+              <a:t>strip or tie</a:t>
             </a:r>
             <a:endParaRPr lang="en-US" sz="850" dirty="0"/>
           </a:p>
@@ -7972,7 +7972,7 @@
                 <a:ea typeface="Calibri" pitchFamily="34" charset="-122"/>
                 <a:cs typeface="Calibri" pitchFamily="34" charset="-120"/>
               </a:rPr>
-              <a:t>state or result of</a:t>
+              <a:t>state or process</a:t>
             </a:r>
             <a:endParaRPr lang="en-US" sz="850" dirty="0"/>
           </a:p>
@@ -8528,7 +8528,7 @@
                 <a:ea typeface="Calibri" pitchFamily="34" charset="-122"/>
                 <a:cs typeface="Calibri" pitchFamily="34" charset="-120"/>
               </a:rPr>
-              <a:t>Word Labs  •  wordlabs.app  •  Suffix: '-age' = state, collection, or process</a:t>
+              <a:t>Word Labs  •  wordlabs.app  •  Suffix: '-age' = state, process, or collection</a:t>
             </a:r>
             <a:endParaRPr lang="en-US" sz="800" dirty="0"/>
           </a:p>
@@ -8845,7 +8845,7 @@
                 <a:ea typeface="Calibri" pitchFamily="34" charset="-122"/>
                 <a:cs typeface="Calibri" pitchFamily="34" charset="-120"/>
               </a:rPr>
-              <a:t>strip or binding</a:t>
+              <a:t>strip or tie</a:t>
             </a:r>
             <a:endParaRPr lang="en-US" sz="850" dirty="0"/>
           </a:p>
@@ -8957,7 +8957,7 @@
                 <a:ea typeface="Calibri" pitchFamily="34" charset="-122"/>
                 <a:cs typeface="Calibri" pitchFamily="34" charset="-120"/>
               </a:rPr>
-              <a:t>state or result of</a:t>
+              <a:t>state or process</a:t>
             </a:r>
             <a:endParaRPr lang="en-US" sz="850" dirty="0"/>
           </a:p>
@@ -9645,7 +9645,7 @@
                 <a:ea typeface="Calibri" pitchFamily="34" charset="-122"/>
                 <a:cs typeface="Calibri" pitchFamily="34" charset="-120"/>
               </a:rPr>
-              <a:t>Word Labs  •  wordlabs.app  •  Suffix: '-age' = state, collection, or process</a:t>
+              <a:t>Word Labs  •  wordlabs.app  •  Suffix: '-age' = state, process, or collection</a:t>
             </a:r>
             <a:endParaRPr lang="en-US" sz="800" dirty="0"/>
           </a:p>
@@ -9962,7 +9962,7 @@
                 <a:ea typeface="Calibri" pitchFamily="34" charset="-122"/>
                 <a:cs typeface="Calibri" pitchFamily="34" charset="-120"/>
               </a:rPr>
-              <a:t>strip or binding</a:t>
+              <a:t>strip or tie</a:t>
             </a:r>
             <a:endParaRPr lang="en-US" sz="850" dirty="0"/>
           </a:p>
@@ -10074,7 +10074,7 @@
                 <a:ea typeface="Calibri" pitchFamily="34" charset="-122"/>
                 <a:cs typeface="Calibri" pitchFamily="34" charset="-120"/>
               </a:rPr>
-              <a:t>state or result of</a:t>
+              <a:t>state or process</a:t>
             </a:r>
             <a:endParaRPr lang="en-US" sz="850" dirty="0"/>
           </a:p>
@@ -10445,7 +10445,7 @@
         </p:nvSpPr>
         <p:spPr>
           <a:xfrm>
-            <a:off x="2254649" y="4169664"/>
+            <a:off x="2427732" y="4169664"/>
             <a:ext cx="685800" cy="384048"/>
           </a:xfrm>
           <a:prstGeom prst="rect">
@@ -10472,7 +10472,7 @@
         </p:nvSpPr>
         <p:spPr>
           <a:xfrm>
-            <a:off x="2254649" y="4169664"/>
+            <a:off x="2427732" y="4169664"/>
             <a:ext cx="685800" cy="384048"/>
           </a:xfrm>
           <a:prstGeom prst="rect">
@@ -10511,7 +10511,7 @@
         </p:nvSpPr>
         <p:spPr>
           <a:xfrm>
-            <a:off x="3293146" y="4169664"/>
+            <a:off x="3639312" y="4169664"/>
             <a:ext cx="685800" cy="384048"/>
           </a:xfrm>
           <a:prstGeom prst="rect">
@@ -10538,7 +10538,7 @@
         </p:nvSpPr>
         <p:spPr>
           <a:xfrm>
-            <a:off x="3293146" y="4169664"/>
+            <a:off x="3639312" y="4169664"/>
             <a:ext cx="685800" cy="384048"/>
           </a:xfrm>
           <a:prstGeom prst="rect">
@@ -10577,7 +10577,7 @@
         </p:nvSpPr>
         <p:spPr>
           <a:xfrm>
-            <a:off x="4331643" y="4169664"/>
+            <a:off x="4850892" y="4169664"/>
             <a:ext cx="685800" cy="384048"/>
           </a:xfrm>
           <a:prstGeom prst="rect">
@@ -10604,7 +10604,7 @@
         </p:nvSpPr>
         <p:spPr>
           <a:xfrm>
-            <a:off x="4331643" y="4169664"/>
+            <a:off x="4850892" y="4169664"/>
             <a:ext cx="685800" cy="384048"/>
           </a:xfrm>
           <a:prstGeom prst="rect">
@@ -10643,7 +10643,7 @@
         </p:nvSpPr>
         <p:spPr>
           <a:xfrm>
-            <a:off x="5370141" y="4169664"/>
+            <a:off x="6062472" y="4169664"/>
             <a:ext cx="685800" cy="384048"/>
           </a:xfrm>
           <a:prstGeom prst="rect">
@@ -10670,7 +10670,7 @@
         </p:nvSpPr>
         <p:spPr>
           <a:xfrm>
-            <a:off x="5370141" y="4169664"/>
+            <a:off x="6062472" y="4169664"/>
             <a:ext cx="685800" cy="384048"/>
           </a:xfrm>
           <a:prstGeom prst="rect">
@@ -10709,7 +10709,7 @@
         </p:nvSpPr>
         <p:spPr>
           <a:xfrm>
-            <a:off x="6408638" y="4169664"/>
+            <a:off x="7274052" y="4169664"/>
             <a:ext cx="685800" cy="384048"/>
           </a:xfrm>
           <a:prstGeom prst="rect">
@@ -10736,7 +10736,7 @@
         </p:nvSpPr>
         <p:spPr>
           <a:xfrm>
-            <a:off x="6408638" y="4169664"/>
+            <a:off x="7274052" y="4169664"/>
             <a:ext cx="685800" cy="384048"/>
           </a:xfrm>
           <a:prstGeom prst="rect">
@@ -10761,7 +10761,7 @@
                 <a:ea typeface="Trebuchet MS" pitchFamily="34" charset="-122"/>
                 <a:cs typeface="Trebuchet MS" pitchFamily="34" charset="-120"/>
               </a:rPr>
-              <a:t>i</a:t>
+              <a:t>age</a:t>
             </a:r>
             <a:endParaRPr lang="en-US" sz="900" dirty="0"/>
           </a:p>
@@ -10769,79 +10769,13 @@
       </p:sp>
       <p:sp>
         <p:nvSpPr>
-          <p:cNvPr id="43" name="Shape 41"/>
-          <p:cNvSpPr/>
-          <p:nvPr/>
-        </p:nvSpPr>
-        <p:spPr>
-          <a:xfrm>
-            <a:off x="7447135" y="4169664"/>
-            <a:ext cx="685800" cy="384048"/>
-          </a:xfrm>
-          <a:prstGeom prst="rect">
-            <a:avLst>
-              <a:gd name="adj" fmla="val 9524"/>
-            </a:avLst>
-          </a:prstGeom>
-          <a:solidFill>
-            <a:srgbClr val="FFFFFF"/>
-          </a:solidFill>
-          <a:ln w="12700">
-            <a:solidFill>
-              <a:srgbClr val="DB2777"/>
-            </a:solidFill>
-            <a:prstDash val="solid"/>
-          </a:ln>
-        </p:spPr>
-      </p:sp>
-      <p:sp>
-        <p:nvSpPr>
-          <p:cNvPr id="44" name="Text 42"/>
-          <p:cNvSpPr/>
-          <p:nvPr/>
-        </p:nvSpPr>
-        <p:spPr>
-          <a:xfrm>
-            <a:off x="7447135" y="4169664"/>
-            <a:ext cx="685800" cy="384048"/>
-          </a:xfrm>
-          <a:prstGeom prst="rect">
-            <a:avLst/>
-          </a:prstGeom>
-          <a:noFill/>
-          <a:ln/>
-        </p:spPr>
-        <p:txBody>
-          <a:bodyPr wrap="square" lIns="0" tIns="0" rIns="0" bIns="0" rtlCol="0" anchor="ctr"/>
-          <a:lstStyle/>
-          <a:p>
-            <a:pPr algn="ctr" indent="0" marL="0">
-              <a:buNone/>
-            </a:pPr>
-            <a:r>
-              <a:rPr lang="en-US" sz="900" b="1" dirty="0">
-                <a:solidFill>
-                  <a:srgbClr val="9D174D"/>
-                </a:solidFill>
-                <a:latin typeface="Trebuchet MS" pitchFamily="34" charset="0"/>
-                <a:ea typeface="Trebuchet MS" pitchFamily="34" charset="-122"/>
-                <a:cs typeface="Trebuchet MS" pitchFamily="34" charset="-120"/>
-              </a:rPr>
-              <a:t>ge</a:t>
-            </a:r>
-            <a:endParaRPr lang="en-US" sz="900" dirty="0"/>
-          </a:p>
-        </p:txBody>
-      </p:sp>
-      <p:sp>
-        <p:nvSpPr>
-          <p:cNvPr id="45" name="Text 43"/>
-          <p:cNvSpPr/>
-          <p:nvPr/>
-        </p:nvSpPr>
-        <p:spPr>
-          <a:xfrm>
-            <a:off x="7447135" y="4572000"/>
+          <p:cNvPr id="43" name="Text 41"/>
+          <p:cNvSpPr/>
+          <p:nvPr/>
+        </p:nvSpPr>
+        <p:spPr>
+          <a:xfrm>
+            <a:off x="7274052" y="4572000"/>
             <a:ext cx="685800" cy="219456"/>
           </a:xfrm>
           <a:prstGeom prst="rect">
@@ -10866,7 +10800,7 @@
                 <a:ea typeface="Calibri" pitchFamily="34" charset="-122"/>
                 <a:cs typeface="Calibri" pitchFamily="34" charset="-120"/>
               </a:rPr>
-              <a:t>/j/</a:t>
+              <a:t>/ij/</a:t>
             </a:r>
             <a:endParaRPr lang="en-US" sz="750" dirty="0"/>
           </a:p>
@@ -11158,7 +11092,7 @@
                 <a:ea typeface="Calibri" pitchFamily="34" charset="-122"/>
                 <a:cs typeface="Calibri" pitchFamily="34" charset="-120"/>
               </a:rPr>
-              <a:t>Word Labs  •  wordlabs.app  •  Suffix: '-age' = state, collection, or process</a:t>
+              <a:t>Word Labs  •  wordlabs.app  •  Suffix: '-age' = state, process, or collection</a:t>
             </a:r>
             <a:endParaRPr lang="en-US" sz="800" dirty="0"/>
           </a:p>
@@ -11297,7 +11231,7 @@
                 <a:ea typeface="Trebuchet MS" pitchFamily="34" charset="-122"/>
                 <a:cs typeface="Trebuchet MS" pitchFamily="34" charset="-120"/>
               </a:rPr>
-              <a:t>storage</a:t>
+              <a:t>shortage</a:t>
             </a:r>
             <a:endParaRPr lang="en-US" sz="2800" dirty="0"/>
           </a:p>
@@ -11985,7 +11919,7 @@
                 <a:ea typeface="Calibri" pitchFamily="34" charset="-122"/>
                 <a:cs typeface="Calibri" pitchFamily="34" charset="-120"/>
               </a:rPr>
-              <a:t>Word Labs  •  wordlabs.app  •  Suffix: '-age' = state, collection, or process</a:t>
+              <a:t>Word Labs  •  wordlabs.app  •  Suffix: '-age' = state, process, or collection</a:t>
             </a:r>
             <a:endParaRPr lang="en-US" sz="800" dirty="0"/>
           </a:p>
@@ -12124,7 +12058,7 @@
                 <a:ea typeface="Trebuchet MS" pitchFamily="34" charset="-122"/>
                 <a:cs typeface="Trebuchet MS" pitchFamily="34" charset="-120"/>
               </a:rPr>
-              <a:t>storage</a:t>
+              <a:t>shortage</a:t>
             </a:r>
             <a:endParaRPr lang="en-US" sz="2800" dirty="0"/>
           </a:p>
@@ -12263,7 +12197,7 @@
                 <a:ea typeface="Trebuchet MS" pitchFamily="34" charset="-122"/>
                 <a:cs typeface="Trebuchet MS" pitchFamily="34" charset="-120"/>
               </a:rPr>
-              <a:t>stor</a:t>
+              <a:t>short</a:t>
             </a:r>
             <a:endParaRPr lang="en-US" sz="1300" dirty="0"/>
           </a:p>
@@ -12302,7 +12236,7 @@
                 <a:ea typeface="Calibri" pitchFamily="34" charset="-122"/>
                 <a:cs typeface="Calibri" pitchFamily="34" charset="-120"/>
               </a:rPr>
-              <a:t>to keep or reserve</a:t>
+              <a:t>not enough</a:t>
             </a:r>
             <a:endParaRPr lang="en-US" sz="850" dirty="0"/>
           </a:p>
@@ -12414,7 +12348,7 @@
                 <a:ea typeface="Calibri" pitchFamily="34" charset="-122"/>
                 <a:cs typeface="Calibri" pitchFamily="34" charset="-120"/>
               </a:rPr>
-              <a:t>state or result of</a:t>
+              <a:t>state or condition</a:t>
             </a:r>
             <a:endParaRPr lang="en-US" sz="850" dirty="0"/>
           </a:p>
@@ -12970,7 +12904,7 @@
                 <a:ea typeface="Calibri" pitchFamily="34" charset="-122"/>
                 <a:cs typeface="Calibri" pitchFamily="34" charset="-120"/>
               </a:rPr>
-              <a:t>Word Labs  •  wordlabs.app  •  Suffix: '-age' = state, collection, or process</a:t>
+              <a:t>Word Labs  •  wordlabs.app  •  Suffix: '-age' = state, process, or collection</a:t>
             </a:r>
             <a:endParaRPr lang="en-US" sz="800" dirty="0"/>
           </a:p>
@@ -13109,7 +13043,7 @@
                 <a:ea typeface="Trebuchet MS" pitchFamily="34" charset="-122"/>
                 <a:cs typeface="Trebuchet MS" pitchFamily="34" charset="-120"/>
               </a:rPr>
-              <a:t>storage</a:t>
+              <a:t>shortage</a:t>
             </a:r>
             <a:endParaRPr lang="en-US" sz="2800" dirty="0"/>
           </a:p>
@@ -13248,7 +13182,7 @@
                 <a:ea typeface="Trebuchet MS" pitchFamily="34" charset="-122"/>
                 <a:cs typeface="Trebuchet MS" pitchFamily="34" charset="-120"/>
               </a:rPr>
-              <a:t>stor</a:t>
+              <a:t>short</a:t>
             </a:r>
             <a:endParaRPr lang="en-US" sz="1300" dirty="0"/>
           </a:p>
@@ -13287,7 +13221,7 @@
                 <a:ea typeface="Calibri" pitchFamily="34" charset="-122"/>
                 <a:cs typeface="Calibri" pitchFamily="34" charset="-120"/>
               </a:rPr>
-              <a:t>to keep or reserve</a:t>
+              <a:t>not enough</a:t>
             </a:r>
             <a:endParaRPr lang="en-US" sz="850" dirty="0"/>
           </a:p>
@@ -13399,7 +13333,7 @@
                 <a:ea typeface="Calibri" pitchFamily="34" charset="-122"/>
                 <a:cs typeface="Calibri" pitchFamily="34" charset="-120"/>
               </a:rPr>
-              <a:t>state or result of</a:t>
+              <a:t>state or condition</a:t>
             </a:r>
             <a:endParaRPr lang="en-US" sz="850" dirty="0"/>
           </a:p>
@@ -13558,7 +13492,7 @@
                 <a:ea typeface="Trebuchet MS" pitchFamily="34" charset="-122"/>
                 <a:cs typeface="Trebuchet MS" pitchFamily="34" charset="-120"/>
               </a:rPr>
-              <a:t>stor</a:t>
+              <a:t>short</a:t>
             </a:r>
             <a:endParaRPr lang="en-US" sz="1400" dirty="0"/>
           </a:p>
@@ -13996,7 +13930,7 @@
                 <a:ea typeface="Calibri" pitchFamily="34" charset="-122"/>
                 <a:cs typeface="Calibri" pitchFamily="34" charset="-120"/>
               </a:rPr>
-              <a:t>Suffix '-age' — state, collection, or process</a:t>
+              <a:t>Suffix '-age' — state, process, or collection</a:t>
             </a:r>
             <a:endParaRPr lang="en-US" sz="1600" dirty="0"/>
           </a:p>
@@ -14352,7 +14286,7 @@
                 <a:ea typeface="Calibri" pitchFamily="34" charset="-122"/>
                 <a:cs typeface="Calibri" pitchFamily="34" charset="-120"/>
               </a:rPr>
-              <a:t>Word Labs  •  wordlabs.app  •  Suffix: '-age' = state, collection, or process</a:t>
+              <a:t>Word Labs  •  wordlabs.app  •  Suffix: '-age' = state, process, or collection</a:t>
             </a:r>
             <a:endParaRPr lang="en-US" sz="800" dirty="0"/>
           </a:p>
@@ -14491,7 +14425,7 @@
                 <a:ea typeface="Trebuchet MS" pitchFamily="34" charset="-122"/>
                 <a:cs typeface="Trebuchet MS" pitchFamily="34" charset="-120"/>
               </a:rPr>
-              <a:t>storage</a:t>
+              <a:t>shortage</a:t>
             </a:r>
             <a:endParaRPr lang="en-US" sz="2800" dirty="0"/>
           </a:p>
@@ -14630,7 +14564,7 @@
                 <a:ea typeface="Trebuchet MS" pitchFamily="34" charset="-122"/>
                 <a:cs typeface="Trebuchet MS" pitchFamily="34" charset="-120"/>
               </a:rPr>
-              <a:t>stor</a:t>
+              <a:t>short</a:t>
             </a:r>
             <a:endParaRPr lang="en-US" sz="1300" dirty="0"/>
           </a:p>
@@ -14669,7 +14603,7 @@
                 <a:ea typeface="Calibri" pitchFamily="34" charset="-122"/>
                 <a:cs typeface="Calibri" pitchFamily="34" charset="-120"/>
               </a:rPr>
-              <a:t>to keep or reserve</a:t>
+              <a:t>not enough</a:t>
             </a:r>
             <a:endParaRPr lang="en-US" sz="850" dirty="0"/>
           </a:p>
@@ -14781,7 +14715,7 @@
                 <a:ea typeface="Calibri" pitchFamily="34" charset="-122"/>
                 <a:cs typeface="Calibri" pitchFamily="34" charset="-120"/>
               </a:rPr>
-              <a:t>state or result of</a:t>
+              <a:t>state or condition</a:t>
             </a:r>
             <a:endParaRPr lang="en-US" sz="850" dirty="0"/>
           </a:p>
@@ -14940,7 +14874,7 @@
                 <a:ea typeface="Trebuchet MS" pitchFamily="34" charset="-122"/>
                 <a:cs typeface="Trebuchet MS" pitchFamily="34" charset="-120"/>
               </a:rPr>
-              <a:t>stor</a:t>
+              <a:t>short</a:t>
             </a:r>
             <a:endParaRPr lang="en-US" sz="1400" dirty="0"/>
           </a:p>
@@ -15152,7 +15086,7 @@
         </p:nvSpPr>
         <p:spPr>
           <a:xfrm>
-            <a:off x="2427732" y="4169664"/>
+            <a:off x="2670048" y="4169664"/>
             <a:ext cx="685800" cy="384048"/>
           </a:xfrm>
           <a:prstGeom prst="rect">
@@ -15179,7 +15113,7 @@
         </p:nvSpPr>
         <p:spPr>
           <a:xfrm>
-            <a:off x="2427732" y="4169664"/>
+            <a:off x="2670048" y="4169664"/>
             <a:ext cx="685800" cy="384048"/>
           </a:xfrm>
           <a:prstGeom prst="rect">
@@ -15204,7 +15138,7 @@
                 <a:ea typeface="Trebuchet MS" pitchFamily="34" charset="-122"/>
                 <a:cs typeface="Trebuchet MS" pitchFamily="34" charset="-120"/>
               </a:rPr>
-              <a:t>s</a:t>
+              <a:t>sh</a:t>
             </a:r>
             <a:endParaRPr lang="en-US" sz="900" dirty="0"/>
           </a:p>
@@ -15218,7 +15152,7 @@
         </p:nvSpPr>
         <p:spPr>
           <a:xfrm>
-            <a:off x="3639312" y="4169664"/>
+            <a:off x="4123944" y="4169664"/>
             <a:ext cx="685800" cy="384048"/>
           </a:xfrm>
           <a:prstGeom prst="rect">
@@ -15245,7 +15179,7 @@
         </p:nvSpPr>
         <p:spPr>
           <a:xfrm>
-            <a:off x="3639312" y="4169664"/>
+            <a:off x="4123944" y="4169664"/>
             <a:ext cx="685800" cy="384048"/>
           </a:xfrm>
           <a:prstGeom prst="rect">
@@ -15270,7 +15204,7 @@
                 <a:ea typeface="Trebuchet MS" pitchFamily="34" charset="-122"/>
                 <a:cs typeface="Trebuchet MS" pitchFamily="34" charset="-120"/>
               </a:rPr>
-              <a:t>t</a:t>
+              <a:t>or</a:t>
             </a:r>
             <a:endParaRPr lang="en-US" sz="900" dirty="0"/>
           </a:p>
@@ -15284,7 +15218,7 @@
         </p:nvSpPr>
         <p:spPr>
           <a:xfrm>
-            <a:off x="4850892" y="4169664"/>
+            <a:off x="5577840" y="4169664"/>
             <a:ext cx="685800" cy="384048"/>
           </a:xfrm>
           <a:prstGeom prst="rect">
@@ -15311,7 +15245,7 @@
         </p:nvSpPr>
         <p:spPr>
           <a:xfrm>
-            <a:off x="4850892" y="4169664"/>
+            <a:off x="5577840" y="4169664"/>
             <a:ext cx="685800" cy="384048"/>
           </a:xfrm>
           <a:prstGeom prst="rect">
@@ -15336,7 +15270,7 @@
                 <a:ea typeface="Trebuchet MS" pitchFamily="34" charset="-122"/>
                 <a:cs typeface="Trebuchet MS" pitchFamily="34" charset="-120"/>
               </a:rPr>
-              <a:t>or</a:t>
+              <a:t>t</a:t>
             </a:r>
             <a:endParaRPr lang="en-US" sz="900" dirty="0"/>
           </a:p>
@@ -15350,7 +15284,7 @@
         </p:nvSpPr>
         <p:spPr>
           <a:xfrm>
-            <a:off x="6062472" y="4169664"/>
+            <a:off x="7031736" y="4169664"/>
             <a:ext cx="685800" cy="384048"/>
           </a:xfrm>
           <a:prstGeom prst="rect">
@@ -15377,7 +15311,7 @@
         </p:nvSpPr>
         <p:spPr>
           <a:xfrm>
-            <a:off x="6062472" y="4169664"/>
+            <a:off x="7031736" y="4169664"/>
             <a:ext cx="685800" cy="384048"/>
           </a:xfrm>
           <a:prstGeom prst="rect">
@@ -15402,7 +15336,7 @@
                 <a:ea typeface="Trebuchet MS" pitchFamily="34" charset="-122"/>
                 <a:cs typeface="Trebuchet MS" pitchFamily="34" charset="-120"/>
               </a:rPr>
-              <a:t>i</a:t>
+              <a:t>age</a:t>
             </a:r>
             <a:endParaRPr lang="en-US" sz="900" dirty="0"/>
           </a:p>
@@ -15410,79 +15344,13 @@
       </p:sp>
       <p:sp>
         <p:nvSpPr>
-          <p:cNvPr id="41" name="Shape 39"/>
-          <p:cNvSpPr/>
-          <p:nvPr/>
-        </p:nvSpPr>
-        <p:spPr>
-          <a:xfrm>
-            <a:off x="7274052" y="4169664"/>
-            <a:ext cx="685800" cy="384048"/>
-          </a:xfrm>
-          <a:prstGeom prst="rect">
-            <a:avLst>
-              <a:gd name="adj" fmla="val 9524"/>
-            </a:avLst>
-          </a:prstGeom>
-          <a:solidFill>
-            <a:srgbClr val="FFFFFF"/>
-          </a:solidFill>
-          <a:ln w="12700">
-            <a:solidFill>
-              <a:srgbClr val="DB2777"/>
-            </a:solidFill>
-            <a:prstDash val="solid"/>
-          </a:ln>
-        </p:spPr>
-      </p:sp>
-      <p:sp>
-        <p:nvSpPr>
-          <p:cNvPr id="42" name="Text 40"/>
-          <p:cNvSpPr/>
-          <p:nvPr/>
-        </p:nvSpPr>
-        <p:spPr>
-          <a:xfrm>
-            <a:off x="7274052" y="4169664"/>
-            <a:ext cx="685800" cy="384048"/>
-          </a:xfrm>
-          <a:prstGeom prst="rect">
-            <a:avLst/>
-          </a:prstGeom>
-          <a:noFill/>
-          <a:ln/>
-        </p:spPr>
-        <p:txBody>
-          <a:bodyPr wrap="square" lIns="0" tIns="0" rIns="0" bIns="0" rtlCol="0" anchor="ctr"/>
-          <a:lstStyle/>
-          <a:p>
-            <a:pPr algn="ctr" indent="0" marL="0">
-              <a:buNone/>
-            </a:pPr>
-            <a:r>
-              <a:rPr lang="en-US" sz="900" b="1" dirty="0">
-                <a:solidFill>
-                  <a:srgbClr val="9D174D"/>
-                </a:solidFill>
-                <a:latin typeface="Trebuchet MS" pitchFamily="34" charset="0"/>
-                <a:ea typeface="Trebuchet MS" pitchFamily="34" charset="-122"/>
-                <a:cs typeface="Trebuchet MS" pitchFamily="34" charset="-120"/>
-              </a:rPr>
-              <a:t>ge</a:t>
-            </a:r>
-            <a:endParaRPr lang="en-US" sz="900" dirty="0"/>
-          </a:p>
-        </p:txBody>
-      </p:sp>
-      <p:sp>
-        <p:nvSpPr>
-          <p:cNvPr id="43" name="Text 41"/>
-          <p:cNvSpPr/>
-          <p:nvPr/>
-        </p:nvSpPr>
-        <p:spPr>
-          <a:xfrm>
-            <a:off x="7274052" y="4572000"/>
+          <p:cNvPr id="41" name="Text 39"/>
+          <p:cNvSpPr/>
+          <p:nvPr/>
+        </p:nvSpPr>
+        <p:spPr>
+          <a:xfrm>
+            <a:off x="7031736" y="4572000"/>
             <a:ext cx="685800" cy="219456"/>
           </a:xfrm>
           <a:prstGeom prst="rect">
@@ -15507,7 +15375,7 @@
                 <a:ea typeface="Calibri" pitchFamily="34" charset="-122"/>
                 <a:cs typeface="Calibri" pitchFamily="34" charset="-120"/>
               </a:rPr>
-              <a:t>/j/</a:t>
+              <a:t>/ij/</a:t>
             </a:r>
             <a:endParaRPr lang="en-US" sz="750" dirty="0"/>
           </a:p>
@@ -16081,7 +15949,7 @@
                 <a:ea typeface="Calibri" pitchFamily="34" charset="-122"/>
                 <a:cs typeface="Calibri" pitchFamily="34" charset="-120"/>
               </a:rPr>
-              <a:t>Word Labs  •  wordlabs.app  •  Suffix: '-age' = state, collection, or process</a:t>
+              <a:t>Word Labs  •  wordlabs.app  •  Suffix: '-age' = state, process, or collection</a:t>
             </a:r>
             <a:endParaRPr lang="en-US" sz="800" dirty="0"/>
           </a:p>
@@ -16721,7 +16589,7 @@
                 <a:ea typeface="Calibri" pitchFamily="34" charset="-122"/>
                 <a:cs typeface="Calibri" pitchFamily="34" charset="-120"/>
               </a:rPr>
-              <a:t>Word Labs  •  wordlabs.app  •  Suffix: '-age' = state, collection, or process</a:t>
+              <a:t>Word Labs  •  wordlabs.app  •  Suffix: '-age' = state, process, or collection</a:t>
             </a:r>
             <a:endParaRPr lang="en-US" sz="800" dirty="0"/>
           </a:p>
@@ -16833,7 +16701,7 @@
                 <a:ea typeface="Calibri" pitchFamily="34" charset="-122"/>
                 <a:cs typeface="Calibri" pitchFamily="34" charset="-120"/>
               </a:rPr>
-              <a:t>The </a:t>
+              <a:t>The old </a:t>
             </a:r>
             <a:pPr algn="l" indent="0" marL="0">
               <a:buNone/>
@@ -16850,7 +16718,7 @@
                 <a:ea typeface="Calibri" pitchFamily="34" charset="-122"/>
                 <a:cs typeface="Calibri" pitchFamily="34" charset="-120"/>
               </a:rPr>
-              <a:t>heritage</a:t>
+              <a:t>village</a:t>
             </a:r>
             <a:pPr algn="l" indent="0" marL="0">
               <a:buNone/>
@@ -16864,7 +16732,7 @@
                 <a:ea typeface="Calibri" pitchFamily="34" charset="-122"/>
                 <a:cs typeface="Calibri" pitchFamily="34" charset="-120"/>
               </a:rPr>
-              <a:t> trail led us through the old </a:t>
+              <a:t> had a long </a:t>
             </a:r>
             <a:pPr algn="l" indent="0" marL="0">
               <a:buNone/>
@@ -16881,7 +16749,7 @@
                 <a:ea typeface="Calibri" pitchFamily="34" charset="-122"/>
                 <a:cs typeface="Calibri" pitchFamily="34" charset="-120"/>
               </a:rPr>
-              <a:t>village</a:t>
+              <a:t>passage</a:t>
             </a:r>
             <a:pPr algn="l" indent="0" marL="0">
               <a:buNone/>
@@ -16895,7 +16763,7 @@
                 <a:ea typeface="Calibri" pitchFamily="34" charset="-122"/>
                 <a:cs typeface="Calibri" pitchFamily="34" charset="-120"/>
               </a:rPr>
-              <a:t>, where we needed real </a:t>
+              <a:t> through the centre, and families shared their cultural </a:t>
             </a:r>
             <a:pPr algn="l" indent="0" marL="0">
               <a:buNone/>
@@ -16912,7 +16780,7 @@
                 <a:ea typeface="Calibri" pitchFamily="34" charset="-122"/>
                 <a:cs typeface="Calibri" pitchFamily="34" charset="-120"/>
               </a:rPr>
-              <a:t>courage</a:t>
+              <a:t>heritage</a:t>
             </a:r>
             <a:pPr algn="l" indent="0" marL="0">
               <a:buNone/>
@@ -16926,7 +16794,7 @@
                 <a:ea typeface="Calibri" pitchFamily="34" charset="-122"/>
                 <a:cs typeface="Calibri" pitchFamily="34" charset="-120"/>
               </a:rPr>
-              <a:t> to climb the steep stone steps.</a:t>
+              <a:t> with pride.</a:t>
             </a:r>
             <a:endParaRPr lang="en-US" sz="1800" dirty="0"/>
           </a:p>
@@ -17081,7 +16949,7 @@
                 <a:ea typeface="Trebuchet MS" pitchFamily="34" charset="-122"/>
                 <a:cs typeface="Trebuchet MS" pitchFamily="34" charset="-120"/>
               </a:rPr>
-              <a:t>heritage</a:t>
+              <a:t>village</a:t>
             </a:r>
             <a:endParaRPr lang="en-US" sz="1400" dirty="0"/>
           </a:p>
@@ -17209,7 +17077,7 @@
                 <a:ea typeface="Trebuchet MS" pitchFamily="34" charset="-122"/>
                 <a:cs typeface="Trebuchet MS" pitchFamily="34" charset="-120"/>
               </a:rPr>
-              <a:t>village</a:t>
+              <a:t>passage</a:t>
             </a:r>
             <a:endParaRPr lang="en-US" sz="1400" dirty="0"/>
           </a:p>
@@ -17337,7 +17205,7 @@
                 <a:ea typeface="Trebuchet MS" pitchFamily="34" charset="-122"/>
                 <a:cs typeface="Trebuchet MS" pitchFamily="34" charset="-120"/>
               </a:rPr>
-              <a:t>courage</a:t>
+              <a:t>heritage</a:t>
             </a:r>
             <a:endParaRPr lang="en-US" sz="1400" dirty="0"/>
           </a:p>
@@ -17668,7 +17536,7 @@
                 <a:ea typeface="Calibri" pitchFamily="34" charset="-122"/>
                 <a:cs typeface="Calibri" pitchFamily="34" charset="-120"/>
               </a:rPr>
-              <a:t>Word Labs  •  wordlabs.app  •  Suffix: '-age' = state, collection, or process</a:t>
+              <a:t>Word Labs  •  wordlabs.app  •  Suffix: '-age' = state, process, or collection</a:t>
             </a:r>
             <a:endParaRPr lang="en-US" sz="800" dirty="0"/>
           </a:p>
@@ -17807,7 +17675,7 @@
                 <a:ea typeface="Trebuchet MS" pitchFamily="34" charset="-122"/>
                 <a:cs typeface="Trebuchet MS" pitchFamily="34" charset="-120"/>
               </a:rPr>
-              <a:t>heritage</a:t>
+              <a:t>village</a:t>
             </a:r>
             <a:endParaRPr lang="en-US" sz="2800" dirty="0"/>
           </a:p>
@@ -18495,7 +18363,7 @@
                 <a:ea typeface="Calibri" pitchFamily="34" charset="-122"/>
                 <a:cs typeface="Calibri" pitchFamily="34" charset="-120"/>
               </a:rPr>
-              <a:t>Word Labs  •  wordlabs.app  •  Suffix: '-age' = state, collection, or process</a:t>
+              <a:t>Word Labs  •  wordlabs.app  •  Suffix: '-age' = state, process, or collection</a:t>
             </a:r>
             <a:endParaRPr lang="en-US" sz="800" dirty="0"/>
           </a:p>
@@ -18634,7 +18502,7 @@
                 <a:ea typeface="Trebuchet MS" pitchFamily="34" charset="-122"/>
                 <a:cs typeface="Trebuchet MS" pitchFamily="34" charset="-120"/>
               </a:rPr>
-              <a:t>heritage</a:t>
+              <a:t>village</a:t>
             </a:r>
             <a:endParaRPr lang="en-US" sz="2800" dirty="0"/>
           </a:p>
@@ -18773,7 +18641,7 @@
                 <a:ea typeface="Trebuchet MS" pitchFamily="34" charset="-122"/>
                 <a:cs typeface="Trebuchet MS" pitchFamily="34" charset="-120"/>
               </a:rPr>
-              <a:t>herit</a:t>
+              <a:t>vill</a:t>
             </a:r>
             <a:endParaRPr lang="en-US" sz="1300" dirty="0"/>
           </a:p>
@@ -18812,7 +18680,7 @@
                 <a:ea typeface="Calibri" pitchFamily="34" charset="-122"/>
                 <a:cs typeface="Calibri" pitchFamily="34" charset="-120"/>
               </a:rPr>
-              <a:t>to inherit or pass down</a:t>
+              <a:t>settlement or farm</a:t>
             </a:r>
             <a:endParaRPr lang="en-US" sz="850" dirty="0"/>
           </a:p>
@@ -18924,7 +18792,7 @@
                 <a:ea typeface="Calibri" pitchFamily="34" charset="-122"/>
                 <a:cs typeface="Calibri" pitchFamily="34" charset="-120"/>
               </a:rPr>
-              <a:t>state or condition of</a:t>
+              <a:t>state or place</a:t>
             </a:r>
             <a:endParaRPr lang="en-US" sz="850" dirty="0"/>
           </a:p>
@@ -19480,7 +19348,7 @@
                 <a:ea typeface="Calibri" pitchFamily="34" charset="-122"/>
                 <a:cs typeface="Calibri" pitchFamily="34" charset="-120"/>
               </a:rPr>
-              <a:t>Word Labs  •  wordlabs.app  •  Suffix: '-age' = state, collection, or process</a:t>
+              <a:t>Word Labs  •  wordlabs.app  •  Suffix: '-age' = state, process, or collection</a:t>
             </a:r>
             <a:endParaRPr lang="en-US" sz="800" dirty="0"/>
           </a:p>
@@ -19619,7 +19487,7 @@
                 <a:ea typeface="Trebuchet MS" pitchFamily="34" charset="-122"/>
                 <a:cs typeface="Trebuchet MS" pitchFamily="34" charset="-120"/>
               </a:rPr>
-              <a:t>heritage</a:t>
+              <a:t>village</a:t>
             </a:r>
             <a:endParaRPr lang="en-US" sz="2800" dirty="0"/>
           </a:p>
@@ -19758,7 +19626,7 @@
                 <a:ea typeface="Trebuchet MS" pitchFamily="34" charset="-122"/>
                 <a:cs typeface="Trebuchet MS" pitchFamily="34" charset="-120"/>
               </a:rPr>
-              <a:t>herit</a:t>
+              <a:t>vill</a:t>
             </a:r>
             <a:endParaRPr lang="en-US" sz="1300" dirty="0"/>
           </a:p>
@@ -19797,7 +19665,7 @@
                 <a:ea typeface="Calibri" pitchFamily="34" charset="-122"/>
                 <a:cs typeface="Calibri" pitchFamily="34" charset="-120"/>
               </a:rPr>
-              <a:t>to inherit or pass down</a:t>
+              <a:t>settlement or farm</a:t>
             </a:r>
             <a:endParaRPr lang="en-US" sz="850" dirty="0"/>
           </a:p>
@@ -19909,7 +19777,7 @@
                 <a:ea typeface="Calibri" pitchFamily="34" charset="-122"/>
                 <a:cs typeface="Calibri" pitchFamily="34" charset="-120"/>
               </a:rPr>
-              <a:t>state or condition of</a:t>
+              <a:t>state or place</a:t>
             </a:r>
             <a:endParaRPr lang="en-US" sz="850" dirty="0"/>
           </a:p>
@@ -20016,7 +19884,7 @@
         </p:nvSpPr>
         <p:spPr>
           <a:xfrm>
-            <a:off x="2313432" y="3364992"/>
+            <a:off x="2999232" y="3364992"/>
             <a:ext cx="1645920" cy="475488"/>
           </a:xfrm>
           <a:prstGeom prst="rect">
@@ -20043,7 +19911,7 @@
         </p:nvSpPr>
         <p:spPr>
           <a:xfrm>
-            <a:off x="2313432" y="3364992"/>
+            <a:off x="2999232" y="3364992"/>
             <a:ext cx="1645920" cy="475488"/>
           </a:xfrm>
           <a:prstGeom prst="rect">
@@ -20068,7 +19936,7 @@
                 <a:ea typeface="Trebuchet MS" pitchFamily="34" charset="-122"/>
                 <a:cs typeface="Trebuchet MS" pitchFamily="34" charset="-120"/>
               </a:rPr>
-              <a:t>her</a:t>
+              <a:t>vil</a:t>
             </a:r>
             <a:endParaRPr lang="en-US" sz="1400" dirty="0"/>
           </a:p>
@@ -20082,8 +19950,8 @@
         </p:nvSpPr>
         <p:spPr>
           <a:xfrm>
-            <a:off x="3959352" y="3364992"/>
-            <a:ext cx="411480" cy="475488"/>
+            <a:off x="4645152" y="3364992"/>
+            <a:ext cx="1097280" cy="475488"/>
           </a:xfrm>
           <a:prstGeom prst="rect">
             <a:avLst/>
@@ -20121,7 +19989,7 @@
         </p:nvSpPr>
         <p:spPr>
           <a:xfrm>
-            <a:off x="4370832" y="3364992"/>
+            <a:off x="5742432" y="3364992"/>
             <a:ext cx="1645920" cy="475488"/>
           </a:xfrm>
           <a:prstGeom prst="rect">
@@ -20148,7 +20016,7 @@
         </p:nvSpPr>
         <p:spPr>
           <a:xfrm>
-            <a:off x="4370832" y="3364992"/>
+            <a:off x="5742432" y="3364992"/>
             <a:ext cx="1645920" cy="475488"/>
           </a:xfrm>
           <a:prstGeom prst="rect">
@@ -20173,7 +20041,7 @@
                 <a:ea typeface="Trebuchet MS" pitchFamily="34" charset="-122"/>
                 <a:cs typeface="Trebuchet MS" pitchFamily="34" charset="-120"/>
               </a:rPr>
-              <a:t>it</a:t>
+              <a:t>lage</a:t>
             </a:r>
             <a:endParaRPr lang="en-US" sz="1400" dirty="0"/>
           </a:p>
@@ -20181,14 +20049,41 @@
       </p:sp>
       <p:sp>
         <p:nvSpPr>
-          <p:cNvPr id="30" name="Text 28"/>
-          <p:cNvSpPr/>
-          <p:nvPr/>
-        </p:nvSpPr>
-        <p:spPr>
-          <a:xfrm>
-            <a:off x="6016752" y="3364992"/>
-            <a:ext cx="411480" cy="475488"/>
+          <p:cNvPr id="30" name="Shape 28"/>
+          <p:cNvSpPr/>
+          <p:nvPr/>
+        </p:nvSpPr>
+        <p:spPr>
+          <a:xfrm>
+            <a:off x="365760" y="4096512"/>
+            <a:ext cx="1371600" cy="804672"/>
+          </a:xfrm>
+          <a:prstGeom prst="rect">
+            <a:avLst>
+              <a:gd name="adj" fmla="val 6818"/>
+            </a:avLst>
+          </a:prstGeom>
+          <a:solidFill>
+            <a:srgbClr val="E2E8F0"/>
+          </a:solidFill>
+          <a:ln w="12700">
+            <a:solidFill>
+              <a:srgbClr val="E2E8F0"/>
+            </a:solidFill>
+            <a:prstDash val="solid"/>
+          </a:ln>
+        </p:spPr>
+      </p:sp>
+      <p:sp>
+        <p:nvSpPr>
+          <p:cNvPr id="31" name="Text 29"/>
+          <p:cNvSpPr/>
+          <p:nvPr/>
+        </p:nvSpPr>
+        <p:spPr>
+          <a:xfrm>
+            <a:off x="365760" y="4096512"/>
+            <a:ext cx="1371600" cy="804672"/>
           </a:xfrm>
           <a:prstGeom prst="rect">
             <a:avLst/>
@@ -20204,96 +20099,30 @@
               <a:buNone/>
             </a:pPr>
             <a:r>
-              <a:rPr lang="en-US" sz="1600" b="1" dirty="0">
-                <a:solidFill>
-                  <a:srgbClr val="0D9488"/>
+              <a:rPr lang="en-US" sz="1100" b="1" dirty="0">
+                <a:solidFill>
+                  <a:srgbClr val="475569"/>
                 </a:solidFill>
                 <a:latin typeface="Trebuchet MS" pitchFamily="34" charset="0"/>
                 <a:ea typeface="Trebuchet MS" pitchFamily="34" charset="-122"/>
                 <a:cs typeface="Trebuchet MS" pitchFamily="34" charset="-120"/>
               </a:rPr>
-              <a:t>·</a:t>
-            </a:r>
-            <a:endParaRPr lang="en-US" sz="1600" dirty="0"/>
-          </a:p>
-        </p:txBody>
-      </p:sp>
-      <p:sp>
-        <p:nvSpPr>
-          <p:cNvPr id="31" name="Shape 29"/>
-          <p:cNvSpPr/>
-          <p:nvPr/>
-        </p:nvSpPr>
-        <p:spPr>
-          <a:xfrm>
-            <a:off x="6428232" y="3364992"/>
-            <a:ext cx="1645920" cy="475488"/>
-          </a:xfrm>
-          <a:prstGeom prst="rect">
-            <a:avLst>
-              <a:gd name="adj" fmla="val 9615"/>
-            </a:avLst>
-          </a:prstGeom>
-          <a:solidFill>
-            <a:srgbClr val="FFFFFF"/>
-          </a:solidFill>
-          <a:ln w="12700">
-            <a:solidFill>
-              <a:srgbClr val="0D9488"/>
-            </a:solidFill>
-            <a:prstDash val="solid"/>
-          </a:ln>
-        </p:spPr>
-      </p:sp>
-      <p:sp>
-        <p:nvSpPr>
-          <p:cNvPr id="32" name="Text 30"/>
-          <p:cNvSpPr/>
-          <p:nvPr/>
-        </p:nvSpPr>
-        <p:spPr>
-          <a:xfrm>
-            <a:off x="6428232" y="3364992"/>
-            <a:ext cx="1645920" cy="475488"/>
-          </a:xfrm>
-          <a:prstGeom prst="rect">
-            <a:avLst/>
-          </a:prstGeom>
-          <a:noFill/>
-          <a:ln/>
-        </p:spPr>
-        <p:txBody>
-          <a:bodyPr wrap="square" lIns="0" tIns="0" rIns="0" bIns="0" rtlCol="0" anchor="ctr"/>
-          <a:lstStyle/>
-          <a:p>
-            <a:pPr algn="ctr" indent="0" marL="0">
-              <a:buNone/>
-            </a:pPr>
-            <a:r>
-              <a:rPr lang="en-US" sz="1400" b="1" dirty="0">
-                <a:solidFill>
-                  <a:srgbClr val="0D9488"/>
-                </a:solidFill>
-                <a:latin typeface="Trebuchet MS" pitchFamily="34" charset="0"/>
-                <a:ea typeface="Trebuchet MS" pitchFamily="34" charset="-122"/>
-                <a:cs typeface="Trebuchet MS" pitchFamily="34" charset="-120"/>
-              </a:rPr>
-              <a:t>age</a:t>
-            </a:r>
-            <a:endParaRPr lang="en-US" sz="1400" dirty="0"/>
-          </a:p>
-        </p:txBody>
-      </p:sp>
-      <p:sp>
-        <p:nvSpPr>
-          <p:cNvPr id="33" name="Shape 31"/>
-          <p:cNvSpPr/>
-          <p:nvPr/>
-        </p:nvSpPr>
-        <p:spPr>
-          <a:xfrm>
-            <a:off x="365760" y="4096512"/>
-            <a:ext cx="1371600" cy="804672"/>
+              <a:t>Phonemes</a:t>
+            </a:r>
+            <a:endParaRPr lang="en-US" sz="1100" dirty="0"/>
+          </a:p>
+        </p:txBody>
+      </p:sp>
+      <p:sp>
+        <p:nvSpPr>
+          <p:cNvPr id="32" name="Shape 30"/>
+          <p:cNvSpPr/>
+          <p:nvPr/>
+        </p:nvSpPr>
+        <p:spPr>
+          <a:xfrm>
+            <a:off x="1874520" y="4096512"/>
+            <a:ext cx="6903720" cy="804672"/>
           </a:xfrm>
           <a:prstGeom prst="rect">
             <a:avLst>
@@ -20301,85 +20130,19 @@
             </a:avLst>
           </a:prstGeom>
           <a:solidFill>
-            <a:srgbClr val="E2E8F0"/>
+            <a:srgbClr val="F8FAFC"/>
           </a:solidFill>
           <a:ln w="12700">
             <a:solidFill>
               <a:srgbClr val="E2E8F0"/>
             </a:solidFill>
-            <a:prstDash val="solid"/>
-          </a:ln>
-        </p:spPr>
-      </p:sp>
-      <p:sp>
-        <p:nvSpPr>
-          <p:cNvPr id="34" name="Text 32"/>
-          <p:cNvSpPr/>
-          <p:nvPr/>
-        </p:nvSpPr>
-        <p:spPr>
-          <a:xfrm>
-            <a:off x="365760" y="4096512"/>
-            <a:ext cx="1371600" cy="804672"/>
-          </a:xfrm>
-          <a:prstGeom prst="rect">
-            <a:avLst/>
-          </a:prstGeom>
-          <a:noFill/>
-          <a:ln/>
-        </p:spPr>
-        <p:txBody>
-          <a:bodyPr wrap="square" lIns="0" tIns="0" rIns="0" bIns="0" rtlCol="0" anchor="ctr"/>
-          <a:lstStyle/>
-          <a:p>
-            <a:pPr algn="ctr" indent="0" marL="0">
-              <a:buNone/>
-            </a:pPr>
-            <a:r>
-              <a:rPr lang="en-US" sz="1100" b="1" dirty="0">
-                <a:solidFill>
-                  <a:srgbClr val="475569"/>
-                </a:solidFill>
-                <a:latin typeface="Trebuchet MS" pitchFamily="34" charset="0"/>
-                <a:ea typeface="Trebuchet MS" pitchFamily="34" charset="-122"/>
-                <a:cs typeface="Trebuchet MS" pitchFamily="34" charset="-120"/>
-              </a:rPr>
-              <a:t>Phonemes</a:t>
-            </a:r>
-            <a:endParaRPr lang="en-US" sz="1100" dirty="0"/>
-          </a:p>
-        </p:txBody>
-      </p:sp>
-      <p:sp>
-        <p:nvSpPr>
-          <p:cNvPr id="35" name="Shape 33"/>
-          <p:cNvSpPr/>
-          <p:nvPr/>
-        </p:nvSpPr>
-        <p:spPr>
-          <a:xfrm>
-            <a:off x="1874520" y="4096512"/>
-            <a:ext cx="6903720" cy="804672"/>
-          </a:xfrm>
-          <a:prstGeom prst="rect">
-            <a:avLst>
-              <a:gd name="adj" fmla="val 6818"/>
-            </a:avLst>
-          </a:prstGeom>
-          <a:solidFill>
-            <a:srgbClr val="F8FAFC"/>
-          </a:solidFill>
-          <a:ln w="12700">
-            <a:solidFill>
-              <a:srgbClr val="E2E8F0"/>
-            </a:solidFill>
             <a:prstDash val="dash"/>
           </a:ln>
         </p:spPr>
       </p:sp>
       <p:sp>
         <p:nvSpPr>
-          <p:cNvPr id="36" name="Text 34"/>
+          <p:cNvPr id="33" name="Text 31"/>
           <p:cNvSpPr/>
           <p:nvPr/>
         </p:nvSpPr>
@@ -20702,7 +20465,7 @@
                 <a:ea typeface="Calibri" pitchFamily="34" charset="-122"/>
                 <a:cs typeface="Calibri" pitchFamily="34" charset="-120"/>
               </a:rPr>
-              <a:t>Word Labs  •  wordlabs.app  •  Suffix: '-age' = state, collection, or process</a:t>
+              <a:t>Word Labs  •  wordlabs.app  •  Suffix: '-age' = state, process, or collection</a:t>
             </a:r>
             <a:endParaRPr lang="en-US" sz="800" dirty="0"/>
           </a:p>
@@ -20841,7 +20604,7 @@
                 <a:ea typeface="Trebuchet MS" pitchFamily="34" charset="-122"/>
                 <a:cs typeface="Trebuchet MS" pitchFamily="34" charset="-120"/>
               </a:rPr>
-              <a:t>heritage</a:t>
+              <a:t>village</a:t>
             </a:r>
             <a:endParaRPr lang="en-US" sz="2800" dirty="0"/>
           </a:p>
@@ -20980,7 +20743,7 @@
                 <a:ea typeface="Trebuchet MS" pitchFamily="34" charset="-122"/>
                 <a:cs typeface="Trebuchet MS" pitchFamily="34" charset="-120"/>
               </a:rPr>
-              <a:t>herit</a:t>
+              <a:t>vill</a:t>
             </a:r>
             <a:endParaRPr lang="en-US" sz="1300" dirty="0"/>
           </a:p>
@@ -21019,7 +20782,7 @@
                 <a:ea typeface="Calibri" pitchFamily="34" charset="-122"/>
                 <a:cs typeface="Calibri" pitchFamily="34" charset="-120"/>
               </a:rPr>
-              <a:t>to inherit or pass down</a:t>
+              <a:t>settlement or farm</a:t>
             </a:r>
             <a:endParaRPr lang="en-US" sz="850" dirty="0"/>
           </a:p>
@@ -21131,7 +20894,7 @@
                 <a:ea typeface="Calibri" pitchFamily="34" charset="-122"/>
                 <a:cs typeface="Calibri" pitchFamily="34" charset="-120"/>
               </a:rPr>
-              <a:t>state or condition of</a:t>
+              <a:t>state or place</a:t>
             </a:r>
             <a:endParaRPr lang="en-US" sz="850" dirty="0"/>
           </a:p>
@@ -21238,7 +21001,7 @@
         </p:nvSpPr>
         <p:spPr>
           <a:xfrm>
-            <a:off x="2313432" y="3364992"/>
+            <a:off x="2999232" y="3364992"/>
             <a:ext cx="1645920" cy="475488"/>
           </a:xfrm>
           <a:prstGeom prst="rect">
@@ -21265,7 +21028,7 @@
         </p:nvSpPr>
         <p:spPr>
           <a:xfrm>
-            <a:off x="2313432" y="3364992"/>
+            <a:off x="2999232" y="3364992"/>
             <a:ext cx="1645920" cy="475488"/>
           </a:xfrm>
           <a:prstGeom prst="rect">
@@ -21290,7 +21053,7 @@
                 <a:ea typeface="Trebuchet MS" pitchFamily="34" charset="-122"/>
                 <a:cs typeface="Trebuchet MS" pitchFamily="34" charset="-120"/>
               </a:rPr>
-              <a:t>her</a:t>
+              <a:t>vil</a:t>
             </a:r>
             <a:endParaRPr lang="en-US" sz="1400" dirty="0"/>
           </a:p>
@@ -21304,8 +21067,8 @@
         </p:nvSpPr>
         <p:spPr>
           <a:xfrm>
-            <a:off x="3959352" y="3364992"/>
-            <a:ext cx="411480" cy="475488"/>
+            <a:off x="4645152" y="3364992"/>
+            <a:ext cx="1097280" cy="475488"/>
           </a:xfrm>
           <a:prstGeom prst="rect">
             <a:avLst/>
@@ -21343,7 +21106,7 @@
         </p:nvSpPr>
         <p:spPr>
           <a:xfrm>
-            <a:off x="4370832" y="3364992"/>
+            <a:off x="5742432" y="3364992"/>
             <a:ext cx="1645920" cy="475488"/>
           </a:xfrm>
           <a:prstGeom prst="rect">
@@ -21370,7 +21133,7 @@
         </p:nvSpPr>
         <p:spPr>
           <a:xfrm>
-            <a:off x="4370832" y="3364992"/>
+            <a:off x="5742432" y="3364992"/>
             <a:ext cx="1645920" cy="475488"/>
           </a:xfrm>
           <a:prstGeom prst="rect">
@@ -21395,7 +21158,7 @@
                 <a:ea typeface="Trebuchet MS" pitchFamily="34" charset="-122"/>
                 <a:cs typeface="Trebuchet MS" pitchFamily="34" charset="-120"/>
               </a:rPr>
-              <a:t>it</a:t>
+              <a:t>lage</a:t>
             </a:r>
             <a:endParaRPr lang="en-US" sz="1400" dirty="0"/>
           </a:p>
@@ -21403,14 +21166,41 @@
       </p:sp>
       <p:sp>
         <p:nvSpPr>
-          <p:cNvPr id="30" name="Text 28"/>
-          <p:cNvSpPr/>
-          <p:nvPr/>
-        </p:nvSpPr>
-        <p:spPr>
-          <a:xfrm>
-            <a:off x="6016752" y="3364992"/>
-            <a:ext cx="411480" cy="475488"/>
+          <p:cNvPr id="30" name="Shape 28"/>
+          <p:cNvSpPr/>
+          <p:nvPr/>
+        </p:nvSpPr>
+        <p:spPr>
+          <a:xfrm>
+            <a:off x="365760" y="4096512"/>
+            <a:ext cx="1371600" cy="804672"/>
+          </a:xfrm>
+          <a:prstGeom prst="rect">
+            <a:avLst>
+              <a:gd name="adj" fmla="val 6818"/>
+            </a:avLst>
+          </a:prstGeom>
+          <a:solidFill>
+            <a:srgbClr val="E2E8F0"/>
+          </a:solidFill>
+          <a:ln w="12700">
+            <a:solidFill>
+              <a:srgbClr val="E2E8F0"/>
+            </a:solidFill>
+            <a:prstDash val="solid"/>
+          </a:ln>
+        </p:spPr>
+      </p:sp>
+      <p:sp>
+        <p:nvSpPr>
+          <p:cNvPr id="31" name="Text 29"/>
+          <p:cNvSpPr/>
+          <p:nvPr/>
+        </p:nvSpPr>
+        <p:spPr>
+          <a:xfrm>
+            <a:off x="365760" y="4096512"/>
+            <a:ext cx="1371600" cy="804672"/>
           </a:xfrm>
           <a:prstGeom prst="rect">
             <a:avLst/>
@@ -21426,57 +21216,84 @@
               <a:buNone/>
             </a:pPr>
             <a:r>
-              <a:rPr lang="en-US" sz="1600" b="1" dirty="0">
-                <a:solidFill>
-                  <a:srgbClr val="0D9488"/>
+              <a:rPr lang="en-US" sz="1100" b="1" dirty="0">
+                <a:solidFill>
+                  <a:srgbClr val="475569"/>
                 </a:solidFill>
                 <a:latin typeface="Trebuchet MS" pitchFamily="34" charset="0"/>
                 <a:ea typeface="Trebuchet MS" pitchFamily="34" charset="-122"/>
                 <a:cs typeface="Trebuchet MS" pitchFamily="34" charset="-120"/>
               </a:rPr>
-              <a:t>·</a:t>
-            </a:r>
-            <a:endParaRPr lang="en-US" sz="1600" dirty="0"/>
-          </a:p>
-        </p:txBody>
-      </p:sp>
-      <p:sp>
-        <p:nvSpPr>
-          <p:cNvPr id="31" name="Shape 29"/>
-          <p:cNvSpPr/>
-          <p:nvPr/>
-        </p:nvSpPr>
-        <p:spPr>
-          <a:xfrm>
-            <a:off x="6428232" y="3364992"/>
-            <a:ext cx="1645920" cy="475488"/>
+              <a:t>Phonemes</a:t>
+            </a:r>
+            <a:endParaRPr lang="en-US" sz="1100" dirty="0"/>
+          </a:p>
+        </p:txBody>
+      </p:sp>
+      <p:sp>
+        <p:nvSpPr>
+          <p:cNvPr id="32" name="Shape 30"/>
+          <p:cNvSpPr/>
+          <p:nvPr/>
+        </p:nvSpPr>
+        <p:spPr>
+          <a:xfrm>
+            <a:off x="1874520" y="4096512"/>
+            <a:ext cx="6903720" cy="804672"/>
           </a:xfrm>
           <a:prstGeom prst="rect">
             <a:avLst>
-              <a:gd name="adj" fmla="val 9615"/>
+              <a:gd name="adj" fmla="val 6818"/>
             </a:avLst>
           </a:prstGeom>
           <a:solidFill>
+            <a:srgbClr val="FCE7F3"/>
+          </a:solidFill>
+          <a:ln w="12700">
+            <a:solidFill>
+              <a:srgbClr val="DB2777"/>
+            </a:solidFill>
+            <a:prstDash val="solid"/>
+          </a:ln>
+        </p:spPr>
+      </p:sp>
+      <p:sp>
+        <p:nvSpPr>
+          <p:cNvPr id="33" name="Shape 31"/>
+          <p:cNvSpPr/>
+          <p:nvPr/>
+        </p:nvSpPr>
+        <p:spPr>
+          <a:xfrm>
+            <a:off x="2670048" y="4169664"/>
+            <a:ext cx="685800" cy="384048"/>
+          </a:xfrm>
+          <a:prstGeom prst="rect">
+            <a:avLst>
+              <a:gd name="adj" fmla="val 9524"/>
+            </a:avLst>
+          </a:prstGeom>
+          <a:solidFill>
             <a:srgbClr val="FFFFFF"/>
           </a:solidFill>
           <a:ln w="12700">
             <a:solidFill>
-              <a:srgbClr val="0D9488"/>
-            </a:solidFill>
-            <a:prstDash val="solid"/>
-          </a:ln>
-        </p:spPr>
-      </p:sp>
-      <p:sp>
-        <p:nvSpPr>
-          <p:cNvPr id="32" name="Text 30"/>
-          <p:cNvSpPr/>
-          <p:nvPr/>
-        </p:nvSpPr>
-        <p:spPr>
-          <a:xfrm>
-            <a:off x="6428232" y="3364992"/>
-            <a:ext cx="1645920" cy="475488"/>
+              <a:srgbClr val="DB2777"/>
+            </a:solidFill>
+            <a:prstDash val="solid"/>
+          </a:ln>
+        </p:spPr>
+      </p:sp>
+      <p:sp>
+        <p:nvSpPr>
+          <p:cNvPr id="34" name="Text 32"/>
+          <p:cNvSpPr/>
+          <p:nvPr/>
+        </p:nvSpPr>
+        <p:spPr>
+          <a:xfrm>
+            <a:off x="2670048" y="4169664"/>
+            <a:ext cx="685800" cy="384048"/>
           </a:xfrm>
           <a:prstGeom prst="rect">
             <a:avLst/>
@@ -21492,57 +21309,57 @@
               <a:buNone/>
             </a:pPr>
             <a:r>
-              <a:rPr lang="en-US" sz="1400" b="1" dirty="0">
-                <a:solidFill>
-                  <a:srgbClr val="0D9488"/>
+              <a:rPr lang="en-US" sz="900" b="1" dirty="0">
+                <a:solidFill>
+                  <a:srgbClr val="9D174D"/>
                 </a:solidFill>
                 <a:latin typeface="Trebuchet MS" pitchFamily="34" charset="0"/>
                 <a:ea typeface="Trebuchet MS" pitchFamily="34" charset="-122"/>
                 <a:cs typeface="Trebuchet MS" pitchFamily="34" charset="-120"/>
               </a:rPr>
-              <a:t>age</a:t>
-            </a:r>
-            <a:endParaRPr lang="en-US" sz="1400" dirty="0"/>
-          </a:p>
-        </p:txBody>
-      </p:sp>
-      <p:sp>
-        <p:nvSpPr>
-          <p:cNvPr id="33" name="Shape 31"/>
-          <p:cNvSpPr/>
-          <p:nvPr/>
-        </p:nvSpPr>
-        <p:spPr>
-          <a:xfrm>
-            <a:off x="365760" y="4096512"/>
-            <a:ext cx="1371600" cy="804672"/>
+              <a:t>v</a:t>
+            </a:r>
+            <a:endParaRPr lang="en-US" sz="900" dirty="0"/>
+          </a:p>
+        </p:txBody>
+      </p:sp>
+      <p:sp>
+        <p:nvSpPr>
+          <p:cNvPr id="35" name="Shape 33"/>
+          <p:cNvSpPr/>
+          <p:nvPr/>
+        </p:nvSpPr>
+        <p:spPr>
+          <a:xfrm>
+            <a:off x="4123944" y="4169664"/>
+            <a:ext cx="685800" cy="384048"/>
           </a:xfrm>
           <a:prstGeom prst="rect">
             <a:avLst>
-              <a:gd name="adj" fmla="val 6818"/>
+              <a:gd name="adj" fmla="val 9524"/>
             </a:avLst>
           </a:prstGeom>
           <a:solidFill>
-            <a:srgbClr val="E2E8F0"/>
-          </a:solidFill>
-          <a:ln w="12700">
-            <a:solidFill>
-              <a:srgbClr val="E2E8F0"/>
-            </a:solidFill>
-            <a:prstDash val="solid"/>
-          </a:ln>
-        </p:spPr>
-      </p:sp>
-      <p:sp>
-        <p:nvSpPr>
-          <p:cNvPr id="34" name="Text 32"/>
-          <p:cNvSpPr/>
-          <p:nvPr/>
-        </p:nvSpPr>
-        <p:spPr>
-          <a:xfrm>
-            <a:off x="365760" y="4096512"/>
-            <a:ext cx="1371600" cy="804672"/>
+            <a:srgbClr val="FFFFFF"/>
+          </a:solidFill>
+          <a:ln w="12700">
+            <a:solidFill>
+              <a:srgbClr val="DB2777"/>
+            </a:solidFill>
+            <a:prstDash val="solid"/>
+          </a:ln>
+        </p:spPr>
+      </p:sp>
+      <p:sp>
+        <p:nvSpPr>
+          <p:cNvPr id="36" name="Text 34"/>
+          <p:cNvSpPr/>
+          <p:nvPr/>
+        </p:nvSpPr>
+        <p:spPr>
+          <a:xfrm>
+            <a:off x="4123944" y="4169664"/>
+            <a:ext cx="685800" cy="384048"/>
           </a:xfrm>
           <a:prstGeom prst="rect">
             <a:avLst/>
@@ -21558,56 +21375,29 @@
               <a:buNone/>
             </a:pPr>
             <a:r>
-              <a:rPr lang="en-US" sz="1100" b="1" dirty="0">
-                <a:solidFill>
-                  <a:srgbClr val="475569"/>
+              <a:rPr lang="en-US" sz="900" b="1" dirty="0">
+                <a:solidFill>
+                  <a:srgbClr val="9D174D"/>
                 </a:solidFill>
                 <a:latin typeface="Trebuchet MS" pitchFamily="34" charset="0"/>
                 <a:ea typeface="Trebuchet MS" pitchFamily="34" charset="-122"/>
                 <a:cs typeface="Trebuchet MS" pitchFamily="34" charset="-120"/>
               </a:rPr>
-              <a:t>Phonemes</a:t>
-            </a:r>
-            <a:endParaRPr lang="en-US" sz="1100" dirty="0"/>
-          </a:p>
-        </p:txBody>
-      </p:sp>
-      <p:sp>
-        <p:nvSpPr>
-          <p:cNvPr id="35" name="Shape 33"/>
-          <p:cNvSpPr/>
-          <p:nvPr/>
-        </p:nvSpPr>
-        <p:spPr>
-          <a:xfrm>
-            <a:off x="1874520" y="4096512"/>
-            <a:ext cx="6903720" cy="804672"/>
-          </a:xfrm>
-          <a:prstGeom prst="rect">
-            <a:avLst>
-              <a:gd name="adj" fmla="val 6818"/>
-            </a:avLst>
-          </a:prstGeom>
-          <a:solidFill>
-            <a:srgbClr val="FCE7F3"/>
-          </a:solidFill>
-          <a:ln w="12700">
-            <a:solidFill>
-              <a:srgbClr val="DB2777"/>
-            </a:solidFill>
-            <a:prstDash val="solid"/>
-          </a:ln>
-        </p:spPr>
-      </p:sp>
-      <p:sp>
-        <p:nvSpPr>
-          <p:cNvPr id="36" name="Shape 34"/>
-          <p:cNvSpPr/>
-          <p:nvPr/>
-        </p:nvSpPr>
-        <p:spPr>
-          <a:xfrm>
-            <a:off x="2254649" y="4169664"/>
+              <a:t>i</a:t>
+            </a:r>
+            <a:endParaRPr lang="en-US" sz="900" dirty="0"/>
+          </a:p>
+        </p:txBody>
+      </p:sp>
+      <p:sp>
+        <p:nvSpPr>
+          <p:cNvPr id="37" name="Shape 35"/>
+          <p:cNvSpPr/>
+          <p:nvPr/>
+        </p:nvSpPr>
+        <p:spPr>
+          <a:xfrm>
+            <a:off x="5577840" y="4169664"/>
             <a:ext cx="685800" cy="384048"/>
           </a:xfrm>
           <a:prstGeom prst="rect">
@@ -21628,13 +21418,13 @@
       </p:sp>
       <p:sp>
         <p:nvSpPr>
-          <p:cNvPr id="37" name="Text 35"/>
-          <p:cNvSpPr/>
-          <p:nvPr/>
-        </p:nvSpPr>
-        <p:spPr>
-          <a:xfrm>
-            <a:off x="2254649" y="4169664"/>
+          <p:cNvPr id="38" name="Text 36"/>
+          <p:cNvSpPr/>
+          <p:nvPr/>
+        </p:nvSpPr>
+        <p:spPr>
+          <a:xfrm>
+            <a:off x="5577840" y="4169664"/>
             <a:ext cx="685800" cy="384048"/>
           </a:xfrm>
           <a:prstGeom prst="rect">
@@ -21659,7 +21449,7 @@
                 <a:ea typeface="Trebuchet MS" pitchFamily="34" charset="-122"/>
                 <a:cs typeface="Trebuchet MS" pitchFamily="34" charset="-120"/>
               </a:rPr>
-              <a:t>h</a:t>
+              <a:t>ll</a:t>
             </a:r>
             <a:endParaRPr lang="en-US" sz="900" dirty="0"/>
           </a:p>
@@ -21667,13 +21457,13 @@
       </p:sp>
       <p:sp>
         <p:nvSpPr>
-          <p:cNvPr id="38" name="Shape 36"/>
-          <p:cNvSpPr/>
-          <p:nvPr/>
-        </p:nvSpPr>
-        <p:spPr>
-          <a:xfrm>
-            <a:off x="3293146" y="4169664"/>
+          <p:cNvPr id="39" name="Shape 37"/>
+          <p:cNvSpPr/>
+          <p:nvPr/>
+        </p:nvSpPr>
+        <p:spPr>
+          <a:xfrm>
+            <a:off x="7031736" y="4169664"/>
             <a:ext cx="685800" cy="384048"/>
           </a:xfrm>
           <a:prstGeom prst="rect">
@@ -21694,13 +21484,13 @@
       </p:sp>
       <p:sp>
         <p:nvSpPr>
-          <p:cNvPr id="39" name="Text 37"/>
-          <p:cNvSpPr/>
-          <p:nvPr/>
-        </p:nvSpPr>
-        <p:spPr>
-          <a:xfrm>
-            <a:off x="3293146" y="4169664"/>
+          <p:cNvPr id="40" name="Text 38"/>
+          <p:cNvSpPr/>
+          <p:nvPr/>
+        </p:nvSpPr>
+        <p:spPr>
+          <a:xfrm>
+            <a:off x="7031736" y="4169664"/>
             <a:ext cx="685800" cy="384048"/>
           </a:xfrm>
           <a:prstGeom prst="rect">
@@ -21725,7 +21515,7 @@
                 <a:ea typeface="Trebuchet MS" pitchFamily="34" charset="-122"/>
                 <a:cs typeface="Trebuchet MS" pitchFamily="34" charset="-120"/>
               </a:rPr>
-              <a:t>er</a:t>
+              <a:t>age</a:t>
             </a:r>
             <a:endParaRPr lang="en-US" sz="900" dirty="0"/>
           </a:p>
@@ -21733,277 +21523,13 @@
       </p:sp>
       <p:sp>
         <p:nvSpPr>
-          <p:cNvPr id="40" name="Shape 38"/>
-          <p:cNvSpPr/>
-          <p:nvPr/>
-        </p:nvSpPr>
-        <p:spPr>
-          <a:xfrm>
-            <a:off x="4331643" y="4169664"/>
-            <a:ext cx="685800" cy="384048"/>
-          </a:xfrm>
-          <a:prstGeom prst="rect">
-            <a:avLst>
-              <a:gd name="adj" fmla="val 9524"/>
-            </a:avLst>
-          </a:prstGeom>
-          <a:solidFill>
-            <a:srgbClr val="FFFFFF"/>
-          </a:solidFill>
-          <a:ln w="12700">
-            <a:solidFill>
-              <a:srgbClr val="DB2777"/>
-            </a:solidFill>
-            <a:prstDash val="solid"/>
-          </a:ln>
-        </p:spPr>
-      </p:sp>
-      <p:sp>
-        <p:nvSpPr>
           <p:cNvPr id="41" name="Text 39"/>
           <p:cNvSpPr/>
           <p:nvPr/>
         </p:nvSpPr>
         <p:spPr>
           <a:xfrm>
-            <a:off x="4331643" y="4169664"/>
-            <a:ext cx="685800" cy="384048"/>
-          </a:xfrm>
-          <a:prstGeom prst="rect">
-            <a:avLst/>
-          </a:prstGeom>
-          <a:noFill/>
-          <a:ln/>
-        </p:spPr>
-        <p:txBody>
-          <a:bodyPr wrap="square" lIns="0" tIns="0" rIns="0" bIns="0" rtlCol="0" anchor="ctr"/>
-          <a:lstStyle/>
-          <a:p>
-            <a:pPr algn="ctr" indent="0" marL="0">
-              <a:buNone/>
-            </a:pPr>
-            <a:r>
-              <a:rPr lang="en-US" sz="900" b="1" dirty="0">
-                <a:solidFill>
-                  <a:srgbClr val="9D174D"/>
-                </a:solidFill>
-                <a:latin typeface="Trebuchet MS" pitchFamily="34" charset="0"/>
-                <a:ea typeface="Trebuchet MS" pitchFamily="34" charset="-122"/>
-                <a:cs typeface="Trebuchet MS" pitchFamily="34" charset="-120"/>
-              </a:rPr>
-              <a:t>i</a:t>
-            </a:r>
-            <a:endParaRPr lang="en-US" sz="900" dirty="0"/>
-          </a:p>
-        </p:txBody>
-      </p:sp>
-      <p:sp>
-        <p:nvSpPr>
-          <p:cNvPr id="42" name="Shape 40"/>
-          <p:cNvSpPr/>
-          <p:nvPr/>
-        </p:nvSpPr>
-        <p:spPr>
-          <a:xfrm>
-            <a:off x="5370141" y="4169664"/>
-            <a:ext cx="685800" cy="384048"/>
-          </a:xfrm>
-          <a:prstGeom prst="rect">
-            <a:avLst>
-              <a:gd name="adj" fmla="val 9524"/>
-            </a:avLst>
-          </a:prstGeom>
-          <a:solidFill>
-            <a:srgbClr val="FFFFFF"/>
-          </a:solidFill>
-          <a:ln w="12700">
-            <a:solidFill>
-              <a:srgbClr val="DB2777"/>
-            </a:solidFill>
-            <a:prstDash val="solid"/>
-          </a:ln>
-        </p:spPr>
-      </p:sp>
-      <p:sp>
-        <p:nvSpPr>
-          <p:cNvPr id="43" name="Text 41"/>
-          <p:cNvSpPr/>
-          <p:nvPr/>
-        </p:nvSpPr>
-        <p:spPr>
-          <a:xfrm>
-            <a:off x="5370141" y="4169664"/>
-            <a:ext cx="685800" cy="384048"/>
-          </a:xfrm>
-          <a:prstGeom prst="rect">
-            <a:avLst/>
-          </a:prstGeom>
-          <a:noFill/>
-          <a:ln/>
-        </p:spPr>
-        <p:txBody>
-          <a:bodyPr wrap="square" lIns="0" tIns="0" rIns="0" bIns="0" rtlCol="0" anchor="ctr"/>
-          <a:lstStyle/>
-          <a:p>
-            <a:pPr algn="ctr" indent="0" marL="0">
-              <a:buNone/>
-            </a:pPr>
-            <a:r>
-              <a:rPr lang="en-US" sz="900" b="1" dirty="0">
-                <a:solidFill>
-                  <a:srgbClr val="9D174D"/>
-                </a:solidFill>
-                <a:latin typeface="Trebuchet MS" pitchFamily="34" charset="0"/>
-                <a:ea typeface="Trebuchet MS" pitchFamily="34" charset="-122"/>
-                <a:cs typeface="Trebuchet MS" pitchFamily="34" charset="-120"/>
-              </a:rPr>
-              <a:t>t</a:t>
-            </a:r>
-            <a:endParaRPr lang="en-US" sz="900" dirty="0"/>
-          </a:p>
-        </p:txBody>
-      </p:sp>
-      <p:sp>
-        <p:nvSpPr>
-          <p:cNvPr id="44" name="Shape 42"/>
-          <p:cNvSpPr/>
-          <p:nvPr/>
-        </p:nvSpPr>
-        <p:spPr>
-          <a:xfrm>
-            <a:off x="6408638" y="4169664"/>
-            <a:ext cx="685800" cy="384048"/>
-          </a:xfrm>
-          <a:prstGeom prst="rect">
-            <a:avLst>
-              <a:gd name="adj" fmla="val 9524"/>
-            </a:avLst>
-          </a:prstGeom>
-          <a:solidFill>
-            <a:srgbClr val="FFFFFF"/>
-          </a:solidFill>
-          <a:ln w="12700">
-            <a:solidFill>
-              <a:srgbClr val="DB2777"/>
-            </a:solidFill>
-            <a:prstDash val="solid"/>
-          </a:ln>
-        </p:spPr>
-      </p:sp>
-      <p:sp>
-        <p:nvSpPr>
-          <p:cNvPr id="45" name="Text 43"/>
-          <p:cNvSpPr/>
-          <p:nvPr/>
-        </p:nvSpPr>
-        <p:spPr>
-          <a:xfrm>
-            <a:off x="6408638" y="4169664"/>
-            <a:ext cx="685800" cy="384048"/>
-          </a:xfrm>
-          <a:prstGeom prst="rect">
-            <a:avLst/>
-          </a:prstGeom>
-          <a:noFill/>
-          <a:ln/>
-        </p:spPr>
-        <p:txBody>
-          <a:bodyPr wrap="square" lIns="0" tIns="0" rIns="0" bIns="0" rtlCol="0" anchor="ctr"/>
-          <a:lstStyle/>
-          <a:p>
-            <a:pPr algn="ctr" indent="0" marL="0">
-              <a:buNone/>
-            </a:pPr>
-            <a:r>
-              <a:rPr lang="en-US" sz="900" b="1" dirty="0">
-                <a:solidFill>
-                  <a:srgbClr val="9D174D"/>
-                </a:solidFill>
-                <a:latin typeface="Trebuchet MS" pitchFamily="34" charset="0"/>
-                <a:ea typeface="Trebuchet MS" pitchFamily="34" charset="-122"/>
-                <a:cs typeface="Trebuchet MS" pitchFamily="34" charset="-120"/>
-              </a:rPr>
-              <a:t>i</a:t>
-            </a:r>
-            <a:endParaRPr lang="en-US" sz="900" dirty="0"/>
-          </a:p>
-        </p:txBody>
-      </p:sp>
-      <p:sp>
-        <p:nvSpPr>
-          <p:cNvPr id="46" name="Shape 44"/>
-          <p:cNvSpPr/>
-          <p:nvPr/>
-        </p:nvSpPr>
-        <p:spPr>
-          <a:xfrm>
-            <a:off x="7447135" y="4169664"/>
-            <a:ext cx="685800" cy="384048"/>
-          </a:xfrm>
-          <a:prstGeom prst="rect">
-            <a:avLst>
-              <a:gd name="adj" fmla="val 9524"/>
-            </a:avLst>
-          </a:prstGeom>
-          <a:solidFill>
-            <a:srgbClr val="FFFFFF"/>
-          </a:solidFill>
-          <a:ln w="12700">
-            <a:solidFill>
-              <a:srgbClr val="DB2777"/>
-            </a:solidFill>
-            <a:prstDash val="solid"/>
-          </a:ln>
-        </p:spPr>
-      </p:sp>
-      <p:sp>
-        <p:nvSpPr>
-          <p:cNvPr id="47" name="Text 45"/>
-          <p:cNvSpPr/>
-          <p:nvPr/>
-        </p:nvSpPr>
-        <p:spPr>
-          <a:xfrm>
-            <a:off x="7447135" y="4169664"/>
-            <a:ext cx="685800" cy="384048"/>
-          </a:xfrm>
-          <a:prstGeom prst="rect">
-            <a:avLst/>
-          </a:prstGeom>
-          <a:noFill/>
-          <a:ln/>
-        </p:spPr>
-        <p:txBody>
-          <a:bodyPr wrap="square" lIns="0" tIns="0" rIns="0" bIns="0" rtlCol="0" anchor="ctr"/>
-          <a:lstStyle/>
-          <a:p>
-            <a:pPr algn="ctr" indent="0" marL="0">
-              <a:buNone/>
-            </a:pPr>
-            <a:r>
-              <a:rPr lang="en-US" sz="900" b="1" dirty="0">
-                <a:solidFill>
-                  <a:srgbClr val="9D174D"/>
-                </a:solidFill>
-                <a:latin typeface="Trebuchet MS" pitchFamily="34" charset="0"/>
-                <a:ea typeface="Trebuchet MS" pitchFamily="34" charset="-122"/>
-                <a:cs typeface="Trebuchet MS" pitchFamily="34" charset="-120"/>
-              </a:rPr>
-              <a:t>ge</a:t>
-            </a:r>
-            <a:endParaRPr lang="en-US" sz="900" dirty="0"/>
-          </a:p>
-        </p:txBody>
-      </p:sp>
-      <p:sp>
-        <p:nvSpPr>
-          <p:cNvPr id="48" name="Text 46"/>
-          <p:cNvSpPr/>
-          <p:nvPr/>
-        </p:nvSpPr>
-        <p:spPr>
-          <a:xfrm>
-            <a:off x="7447135" y="4572000"/>
+            <a:off x="7031736" y="4572000"/>
             <a:ext cx="685800" cy="219456"/>
           </a:xfrm>
           <a:prstGeom prst="rect">
@@ -22028,7 +21554,7 @@
                 <a:ea typeface="Calibri" pitchFamily="34" charset="-122"/>
                 <a:cs typeface="Calibri" pitchFamily="34" charset="-120"/>
               </a:rPr>
-              <a:t>/j/</a:t>
+              <a:t>/ij/</a:t>
             </a:r>
             <a:endParaRPr lang="en-US" sz="750" dirty="0"/>
           </a:p>
@@ -22320,7 +21846,7 @@
                 <a:ea typeface="Calibri" pitchFamily="34" charset="-122"/>
                 <a:cs typeface="Calibri" pitchFamily="34" charset="-120"/>
               </a:rPr>
-              <a:t>Word Labs  •  wordlabs.app  •  Suffix: '-age' = state, collection, or process</a:t>
+              <a:t>Word Labs  •  wordlabs.app  •  Suffix: '-age' = state, process, or collection</a:t>
             </a:r>
             <a:endParaRPr lang="en-US" sz="800" dirty="0"/>
           </a:p>
@@ -22459,7 +21985,7 @@
                 <a:ea typeface="Trebuchet MS" pitchFamily="34" charset="-122"/>
                 <a:cs typeface="Trebuchet MS" pitchFamily="34" charset="-120"/>
               </a:rPr>
-              <a:t>village</a:t>
+              <a:t>passage</a:t>
             </a:r>
             <a:endParaRPr lang="en-US" sz="2800" dirty="0"/>
           </a:p>
@@ -23147,7 +22673,7 @@
                 <a:ea typeface="Calibri" pitchFamily="34" charset="-122"/>
                 <a:cs typeface="Calibri" pitchFamily="34" charset="-120"/>
               </a:rPr>
-              <a:t>Word Labs  •  wordlabs.app  •  Suffix: '-age' = state, collection, or process</a:t>
+              <a:t>Word Labs  •  wordlabs.app  •  Suffix: '-age' = state, process, or collection</a:t>
             </a:r>
             <a:endParaRPr lang="en-US" sz="800" dirty="0"/>
           </a:p>
@@ -23286,7 +22812,7 @@
                 <a:ea typeface="Trebuchet MS" pitchFamily="34" charset="-122"/>
                 <a:cs typeface="Trebuchet MS" pitchFamily="34" charset="-120"/>
               </a:rPr>
-              <a:t>village</a:t>
+              <a:t>passage</a:t>
             </a:r>
             <a:endParaRPr lang="en-US" sz="2800" dirty="0"/>
           </a:p>
@@ -23425,7 +22951,7 @@
                 <a:ea typeface="Trebuchet MS" pitchFamily="34" charset="-122"/>
                 <a:cs typeface="Trebuchet MS" pitchFamily="34" charset="-120"/>
               </a:rPr>
-              <a:t>vill</a:t>
+              <a:t>pass</a:t>
             </a:r>
             <a:endParaRPr lang="en-US" sz="1300" dirty="0"/>
           </a:p>
@@ -23464,7 +22990,7 @@
                 <a:ea typeface="Calibri" pitchFamily="34" charset="-122"/>
                 <a:cs typeface="Calibri" pitchFamily="34" charset="-120"/>
               </a:rPr>
-              <a:t>settlement or farm</a:t>
+              <a:t>go through</a:t>
             </a:r>
             <a:endParaRPr lang="en-US" sz="850" dirty="0"/>
           </a:p>
@@ -23576,7 +23102,7 @@
                 <a:ea typeface="Calibri" pitchFamily="34" charset="-122"/>
                 <a:cs typeface="Calibri" pitchFamily="34" charset="-120"/>
               </a:rPr>
-              <a:t>collection or place</a:t>
+              <a:t>state or process</a:t>
             </a:r>
             <a:endParaRPr lang="en-US" sz="850" dirty="0"/>
           </a:p>
@@ -24132,7 +23658,7 @@
                 <a:ea typeface="Calibri" pitchFamily="34" charset="-122"/>
                 <a:cs typeface="Calibri" pitchFamily="34" charset="-120"/>
               </a:rPr>
-              <a:t>Word Labs  •  wordlabs.app  •  Suffix: '-age' = state, collection, or process</a:t>
+              <a:t>Word Labs  •  wordlabs.app  •  Suffix: '-age' = state, process, or collection</a:t>
             </a:r>
             <a:endParaRPr lang="en-US" sz="800" dirty="0"/>
           </a:p>
@@ -24205,7 +23731,7 @@
                 <a:ea typeface="Trebuchet MS" pitchFamily="34" charset="-122"/>
                 <a:cs typeface="Trebuchet MS" pitchFamily="34" charset="-120"/>
               </a:rPr>
-              <a:t>We are learning that the suffix '-age' means 'state, collection, or process'.</a:t>
+              <a:t>We are learning that the suffix '-age' means 'state, process, or collection'.</a:t>
             </a:r>
             <a:endParaRPr lang="en-US" sz="2000" dirty="0"/>
           </a:p>
@@ -24851,7 +24377,7 @@
                 <a:ea typeface="Calibri" pitchFamily="34" charset="-122"/>
                 <a:cs typeface="Calibri" pitchFamily="34" charset="-120"/>
               </a:rPr>
-              <a:t>Word Labs  •  wordlabs.app  •  Suffix: '-age' = state, collection, or process</a:t>
+              <a:t>Word Labs  •  wordlabs.app  •  Suffix: '-age' = state, process, or collection</a:t>
             </a:r>
             <a:endParaRPr lang="en-US" sz="800" dirty="0"/>
           </a:p>
@@ -24990,7 +24516,7 @@
                 <a:ea typeface="Trebuchet MS" pitchFamily="34" charset="-122"/>
                 <a:cs typeface="Trebuchet MS" pitchFamily="34" charset="-120"/>
               </a:rPr>
-              <a:t>village</a:t>
+              <a:t>passage</a:t>
             </a:r>
             <a:endParaRPr lang="en-US" sz="2800" dirty="0"/>
           </a:p>
@@ -25129,7 +24655,7 @@
                 <a:ea typeface="Trebuchet MS" pitchFamily="34" charset="-122"/>
                 <a:cs typeface="Trebuchet MS" pitchFamily="34" charset="-120"/>
               </a:rPr>
-              <a:t>vill</a:t>
+              <a:t>pass</a:t>
             </a:r>
             <a:endParaRPr lang="en-US" sz="1300" dirty="0"/>
           </a:p>
@@ -25168,7 +24694,7 @@
                 <a:ea typeface="Calibri" pitchFamily="34" charset="-122"/>
                 <a:cs typeface="Calibri" pitchFamily="34" charset="-120"/>
               </a:rPr>
-              <a:t>settlement or farm</a:t>
+              <a:t>go through</a:t>
             </a:r>
             <a:endParaRPr lang="en-US" sz="850" dirty="0"/>
           </a:p>
@@ -25280,7 +24806,7 @@
                 <a:ea typeface="Calibri" pitchFamily="34" charset="-122"/>
                 <a:cs typeface="Calibri" pitchFamily="34" charset="-120"/>
               </a:rPr>
-              <a:t>collection or place</a:t>
+              <a:t>state or process</a:t>
             </a:r>
             <a:endParaRPr lang="en-US" sz="850" dirty="0"/>
           </a:p>
@@ -25439,7 +24965,7 @@
                 <a:ea typeface="Trebuchet MS" pitchFamily="34" charset="-122"/>
                 <a:cs typeface="Trebuchet MS" pitchFamily="34" charset="-120"/>
               </a:rPr>
-              <a:t>vil</a:t>
+              <a:t>pas</a:t>
             </a:r>
             <a:endParaRPr lang="en-US" sz="1400" dirty="0"/>
           </a:p>
@@ -25544,7 +25070,7 @@
                 <a:ea typeface="Trebuchet MS" pitchFamily="34" charset="-122"/>
                 <a:cs typeface="Trebuchet MS" pitchFamily="34" charset="-120"/>
               </a:rPr>
-              <a:t>lage</a:t>
+              <a:t>sage</a:t>
             </a:r>
             <a:endParaRPr lang="en-US" sz="1400" dirty="0"/>
           </a:p>
@@ -25968,7 +25494,7 @@
                 <a:ea typeface="Calibri" pitchFamily="34" charset="-122"/>
                 <a:cs typeface="Calibri" pitchFamily="34" charset="-120"/>
               </a:rPr>
-              <a:t>Word Labs  •  wordlabs.app  •  Suffix: '-age' = state, collection, or process</a:t>
+              <a:t>Word Labs  •  wordlabs.app  •  Suffix: '-age' = state, process, or collection</a:t>
             </a:r>
             <a:endParaRPr lang="en-US" sz="800" dirty="0"/>
           </a:p>
@@ -26107,7 +25633,7 @@
                 <a:ea typeface="Trebuchet MS" pitchFamily="34" charset="-122"/>
                 <a:cs typeface="Trebuchet MS" pitchFamily="34" charset="-120"/>
               </a:rPr>
-              <a:t>village</a:t>
+              <a:t>passage</a:t>
             </a:r>
             <a:endParaRPr lang="en-US" sz="2800" dirty="0"/>
           </a:p>
@@ -26246,7 +25772,7 @@
                 <a:ea typeface="Trebuchet MS" pitchFamily="34" charset="-122"/>
                 <a:cs typeface="Trebuchet MS" pitchFamily="34" charset="-120"/>
               </a:rPr>
-              <a:t>vill</a:t>
+              <a:t>pass</a:t>
             </a:r>
             <a:endParaRPr lang="en-US" sz="1300" dirty="0"/>
           </a:p>
@@ -26285,7 +25811,7 @@
                 <a:ea typeface="Calibri" pitchFamily="34" charset="-122"/>
                 <a:cs typeface="Calibri" pitchFamily="34" charset="-120"/>
               </a:rPr>
-              <a:t>settlement or farm</a:t>
+              <a:t>go through</a:t>
             </a:r>
             <a:endParaRPr lang="en-US" sz="850" dirty="0"/>
           </a:p>
@@ -26397,7 +25923,7 @@
                 <a:ea typeface="Calibri" pitchFamily="34" charset="-122"/>
                 <a:cs typeface="Calibri" pitchFamily="34" charset="-120"/>
               </a:rPr>
-              <a:t>collection or place</a:t>
+              <a:t>state or process</a:t>
             </a:r>
             <a:endParaRPr lang="en-US" sz="850" dirty="0"/>
           </a:p>
@@ -26556,7 +26082,7 @@
                 <a:ea typeface="Trebuchet MS" pitchFamily="34" charset="-122"/>
                 <a:cs typeface="Trebuchet MS" pitchFamily="34" charset="-120"/>
               </a:rPr>
-              <a:t>vil</a:t>
+              <a:t>pas</a:t>
             </a:r>
             <a:endParaRPr lang="en-US" sz="1400" dirty="0"/>
           </a:p>
@@ -26661,7 +26187,7 @@
                 <a:ea typeface="Trebuchet MS" pitchFamily="34" charset="-122"/>
                 <a:cs typeface="Trebuchet MS" pitchFamily="34" charset="-120"/>
               </a:rPr>
-              <a:t>lage</a:t>
+              <a:t>sage</a:t>
             </a:r>
             <a:endParaRPr lang="en-US" sz="1400" dirty="0"/>
           </a:p>
@@ -26768,7 +26294,7 @@
         </p:nvSpPr>
         <p:spPr>
           <a:xfrm>
-            <a:off x="2427732" y="4169664"/>
+            <a:off x="2670048" y="4169664"/>
             <a:ext cx="685800" cy="384048"/>
           </a:xfrm>
           <a:prstGeom prst="rect">
@@ -26795,7 +26321,7 @@
         </p:nvSpPr>
         <p:spPr>
           <a:xfrm>
-            <a:off x="2427732" y="4169664"/>
+            <a:off x="2670048" y="4169664"/>
             <a:ext cx="685800" cy="384048"/>
           </a:xfrm>
           <a:prstGeom prst="rect">
@@ -26820,7 +26346,7 @@
                 <a:ea typeface="Trebuchet MS" pitchFamily="34" charset="-122"/>
                 <a:cs typeface="Trebuchet MS" pitchFamily="34" charset="-120"/>
               </a:rPr>
-              <a:t>v</a:t>
+              <a:t>p</a:t>
             </a:r>
             <a:endParaRPr lang="en-US" sz="900" dirty="0"/>
           </a:p>
@@ -26834,7 +26360,7 @@
         </p:nvSpPr>
         <p:spPr>
           <a:xfrm>
-            <a:off x="3639312" y="4169664"/>
+            <a:off x="4123944" y="4169664"/>
             <a:ext cx="685800" cy="384048"/>
           </a:xfrm>
           <a:prstGeom prst="rect">
@@ -26861,7 +26387,7 @@
         </p:nvSpPr>
         <p:spPr>
           <a:xfrm>
-            <a:off x="3639312" y="4169664"/>
+            <a:off x="4123944" y="4169664"/>
             <a:ext cx="685800" cy="384048"/>
           </a:xfrm>
           <a:prstGeom prst="rect">
@@ -26886,7 +26412,7 @@
                 <a:ea typeface="Trebuchet MS" pitchFamily="34" charset="-122"/>
                 <a:cs typeface="Trebuchet MS" pitchFamily="34" charset="-120"/>
               </a:rPr>
-              <a:t>i</a:t>
+              <a:t>a</a:t>
             </a:r>
             <a:endParaRPr lang="en-US" sz="900" dirty="0"/>
           </a:p>
@@ -26900,7 +26426,7 @@
         </p:nvSpPr>
         <p:spPr>
           <a:xfrm>
-            <a:off x="4850892" y="4169664"/>
+            <a:off x="5577840" y="4169664"/>
             <a:ext cx="685800" cy="384048"/>
           </a:xfrm>
           <a:prstGeom prst="rect">
@@ -26927,7 +26453,7 @@
         </p:nvSpPr>
         <p:spPr>
           <a:xfrm>
-            <a:off x="4850892" y="4169664"/>
+            <a:off x="5577840" y="4169664"/>
             <a:ext cx="685800" cy="384048"/>
           </a:xfrm>
           <a:prstGeom prst="rect">
@@ -26952,7 +26478,7 @@
                 <a:ea typeface="Trebuchet MS" pitchFamily="34" charset="-122"/>
                 <a:cs typeface="Trebuchet MS" pitchFamily="34" charset="-120"/>
               </a:rPr>
-              <a:t>ll</a:t>
+              <a:t>ss</a:t>
             </a:r>
             <a:endParaRPr lang="en-US" sz="900" dirty="0"/>
           </a:p>
@@ -26966,7 +26492,7 @@
         </p:nvSpPr>
         <p:spPr>
           <a:xfrm>
-            <a:off x="6062472" y="4169664"/>
+            <a:off x="7031736" y="4169664"/>
             <a:ext cx="685800" cy="384048"/>
           </a:xfrm>
           <a:prstGeom prst="rect">
@@ -26993,7 +26519,7 @@
         </p:nvSpPr>
         <p:spPr>
           <a:xfrm>
-            <a:off x="6062472" y="4169664"/>
+            <a:off x="7031736" y="4169664"/>
             <a:ext cx="685800" cy="384048"/>
           </a:xfrm>
           <a:prstGeom prst="rect">
@@ -27018,7 +26544,7 @@
                 <a:ea typeface="Trebuchet MS" pitchFamily="34" charset="-122"/>
                 <a:cs typeface="Trebuchet MS" pitchFamily="34" charset="-120"/>
               </a:rPr>
-              <a:t>i</a:t>
+              <a:t>age</a:t>
             </a:r>
             <a:endParaRPr lang="en-US" sz="900" dirty="0"/>
           </a:p>
@@ -27026,79 +26552,13 @@
       </p:sp>
       <p:sp>
         <p:nvSpPr>
-          <p:cNvPr id="41" name="Shape 39"/>
-          <p:cNvSpPr/>
-          <p:nvPr/>
-        </p:nvSpPr>
-        <p:spPr>
-          <a:xfrm>
-            <a:off x="7274052" y="4169664"/>
-            <a:ext cx="685800" cy="384048"/>
-          </a:xfrm>
-          <a:prstGeom prst="rect">
-            <a:avLst>
-              <a:gd name="adj" fmla="val 9524"/>
-            </a:avLst>
-          </a:prstGeom>
-          <a:solidFill>
-            <a:srgbClr val="FFFFFF"/>
-          </a:solidFill>
-          <a:ln w="12700">
-            <a:solidFill>
-              <a:srgbClr val="DB2777"/>
-            </a:solidFill>
-            <a:prstDash val="solid"/>
-          </a:ln>
-        </p:spPr>
-      </p:sp>
-      <p:sp>
-        <p:nvSpPr>
-          <p:cNvPr id="42" name="Text 40"/>
-          <p:cNvSpPr/>
-          <p:nvPr/>
-        </p:nvSpPr>
-        <p:spPr>
-          <a:xfrm>
-            <a:off x="7274052" y="4169664"/>
-            <a:ext cx="685800" cy="384048"/>
-          </a:xfrm>
-          <a:prstGeom prst="rect">
-            <a:avLst/>
-          </a:prstGeom>
-          <a:noFill/>
-          <a:ln/>
-        </p:spPr>
-        <p:txBody>
-          <a:bodyPr wrap="square" lIns="0" tIns="0" rIns="0" bIns="0" rtlCol="0" anchor="ctr"/>
-          <a:lstStyle/>
-          <a:p>
-            <a:pPr algn="ctr" indent="0" marL="0">
-              <a:buNone/>
-            </a:pPr>
-            <a:r>
-              <a:rPr lang="en-US" sz="900" b="1" dirty="0">
-                <a:solidFill>
-                  <a:srgbClr val="9D174D"/>
-                </a:solidFill>
-                <a:latin typeface="Trebuchet MS" pitchFamily="34" charset="0"/>
-                <a:ea typeface="Trebuchet MS" pitchFamily="34" charset="-122"/>
-                <a:cs typeface="Trebuchet MS" pitchFamily="34" charset="-120"/>
-              </a:rPr>
-              <a:t>ge</a:t>
-            </a:r>
-            <a:endParaRPr lang="en-US" sz="900" dirty="0"/>
-          </a:p>
-        </p:txBody>
-      </p:sp>
-      <p:sp>
-        <p:nvSpPr>
-          <p:cNvPr id="43" name="Text 41"/>
-          <p:cNvSpPr/>
-          <p:nvPr/>
-        </p:nvSpPr>
-        <p:spPr>
-          <a:xfrm>
-            <a:off x="7274052" y="4572000"/>
+          <p:cNvPr id="41" name="Text 39"/>
+          <p:cNvSpPr/>
+          <p:nvPr/>
+        </p:nvSpPr>
+        <p:spPr>
+          <a:xfrm>
+            <a:off x="7031736" y="4572000"/>
             <a:ext cx="685800" cy="219456"/>
           </a:xfrm>
           <a:prstGeom prst="rect">
@@ -27123,7 +26583,7 @@
                 <a:ea typeface="Calibri" pitchFamily="34" charset="-122"/>
                 <a:cs typeface="Calibri" pitchFamily="34" charset="-120"/>
               </a:rPr>
-              <a:t>/j/</a:t>
+              <a:t>/ij/</a:t>
             </a:r>
             <a:endParaRPr lang="en-US" sz="750" dirty="0"/>
           </a:p>
@@ -27415,7 +26875,7 @@
                 <a:ea typeface="Calibri" pitchFamily="34" charset="-122"/>
                 <a:cs typeface="Calibri" pitchFamily="34" charset="-120"/>
               </a:rPr>
-              <a:t>Word Labs  •  wordlabs.app  •  Suffix: '-age' = state, collection, or process</a:t>
+              <a:t>Word Labs  •  wordlabs.app  •  Suffix: '-age' = state, process, or collection</a:t>
             </a:r>
             <a:endParaRPr lang="en-US" sz="800" dirty="0"/>
           </a:p>
@@ -27554,7 +27014,7 @@
                 <a:ea typeface="Trebuchet MS" pitchFamily="34" charset="-122"/>
                 <a:cs typeface="Trebuchet MS" pitchFamily="34" charset="-120"/>
               </a:rPr>
-              <a:t>courage</a:t>
+              <a:t>heritage</a:t>
             </a:r>
             <a:endParaRPr lang="en-US" sz="2800" dirty="0"/>
           </a:p>
@@ -28242,7 +27702,7 @@
                 <a:ea typeface="Calibri" pitchFamily="34" charset="-122"/>
                 <a:cs typeface="Calibri" pitchFamily="34" charset="-120"/>
               </a:rPr>
-              <a:t>Word Labs  •  wordlabs.app  •  Suffix: '-age' = state, collection, or process</a:t>
+              <a:t>Word Labs  •  wordlabs.app  •  Suffix: '-age' = state, process, or collection</a:t>
             </a:r>
             <a:endParaRPr lang="en-US" sz="800" dirty="0"/>
           </a:p>
@@ -28381,7 +27841,7 @@
                 <a:ea typeface="Trebuchet MS" pitchFamily="34" charset="-122"/>
                 <a:cs typeface="Trebuchet MS" pitchFamily="34" charset="-120"/>
               </a:rPr>
-              <a:t>courage</a:t>
+              <a:t>heritage</a:t>
             </a:r>
             <a:endParaRPr lang="en-US" sz="2800" dirty="0"/>
           </a:p>
@@ -28520,7 +27980,7 @@
                 <a:ea typeface="Trebuchet MS" pitchFamily="34" charset="-122"/>
                 <a:cs typeface="Trebuchet MS" pitchFamily="34" charset="-120"/>
               </a:rPr>
-              <a:t>cour</a:t>
+              <a:t>herit</a:t>
             </a:r>
             <a:endParaRPr lang="en-US" sz="1300" dirty="0"/>
           </a:p>
@@ -28559,7 +28019,7 @@
                 <a:ea typeface="Calibri" pitchFamily="34" charset="-122"/>
                 <a:cs typeface="Calibri" pitchFamily="34" charset="-120"/>
               </a:rPr>
-              <a:t>heart (Latin: cor)</a:t>
+              <a:t>inherit or pass down</a:t>
             </a:r>
             <a:endParaRPr lang="en-US" sz="850" dirty="0"/>
           </a:p>
@@ -28671,7 +28131,7 @@
                 <a:ea typeface="Calibri" pitchFamily="34" charset="-122"/>
                 <a:cs typeface="Calibri" pitchFamily="34" charset="-120"/>
               </a:rPr>
-              <a:t>state or quality of</a:t>
+              <a:t>state or condition</a:t>
             </a:r>
             <a:endParaRPr lang="en-US" sz="850" dirty="0"/>
           </a:p>
@@ -29227,7 +28687,7 @@
                 <a:ea typeface="Calibri" pitchFamily="34" charset="-122"/>
                 <a:cs typeface="Calibri" pitchFamily="34" charset="-120"/>
               </a:rPr>
-              <a:t>Word Labs  •  wordlabs.app  •  Suffix: '-age' = state, collection, or process</a:t>
+              <a:t>Word Labs  •  wordlabs.app  •  Suffix: '-age' = state, process, or collection</a:t>
             </a:r>
             <a:endParaRPr lang="en-US" sz="800" dirty="0"/>
           </a:p>
@@ -29366,7 +28826,7 @@
                 <a:ea typeface="Trebuchet MS" pitchFamily="34" charset="-122"/>
                 <a:cs typeface="Trebuchet MS" pitchFamily="34" charset="-120"/>
               </a:rPr>
-              <a:t>courage</a:t>
+              <a:t>heritage</a:t>
             </a:r>
             <a:endParaRPr lang="en-US" sz="2800" dirty="0"/>
           </a:p>
@@ -29505,7 +28965,7 @@
                 <a:ea typeface="Trebuchet MS" pitchFamily="34" charset="-122"/>
                 <a:cs typeface="Trebuchet MS" pitchFamily="34" charset="-120"/>
               </a:rPr>
-              <a:t>cour</a:t>
+              <a:t>herit</a:t>
             </a:r>
             <a:endParaRPr lang="en-US" sz="1300" dirty="0"/>
           </a:p>
@@ -29544,7 +29004,7 @@
                 <a:ea typeface="Calibri" pitchFamily="34" charset="-122"/>
                 <a:cs typeface="Calibri" pitchFamily="34" charset="-120"/>
               </a:rPr>
-              <a:t>heart (Latin: cor)</a:t>
+              <a:t>inherit or pass down</a:t>
             </a:r>
             <a:endParaRPr lang="en-US" sz="850" dirty="0"/>
           </a:p>
@@ -29656,7 +29116,7 @@
                 <a:ea typeface="Calibri" pitchFamily="34" charset="-122"/>
                 <a:cs typeface="Calibri" pitchFamily="34" charset="-120"/>
               </a:rPr>
-              <a:t>state or quality of</a:t>
+              <a:t>state or condition</a:t>
             </a:r>
             <a:endParaRPr lang="en-US" sz="850" dirty="0"/>
           </a:p>
@@ -29763,7 +29223,7 @@
         </p:nvSpPr>
         <p:spPr>
           <a:xfrm>
-            <a:off x="2999232" y="3364992"/>
+            <a:off x="2313432" y="3364992"/>
             <a:ext cx="1645920" cy="475488"/>
           </a:xfrm>
           <a:prstGeom prst="rect">
@@ -29790,7 +29250,7 @@
         </p:nvSpPr>
         <p:spPr>
           <a:xfrm>
-            <a:off x="2999232" y="3364992"/>
+            <a:off x="2313432" y="3364992"/>
             <a:ext cx="1645920" cy="475488"/>
           </a:xfrm>
           <a:prstGeom prst="rect">
@@ -29815,7 +29275,7 @@
                 <a:ea typeface="Trebuchet MS" pitchFamily="34" charset="-122"/>
                 <a:cs typeface="Trebuchet MS" pitchFamily="34" charset="-120"/>
               </a:rPr>
-              <a:t>cour</a:t>
+              <a:t>her</a:t>
             </a:r>
             <a:endParaRPr lang="en-US" sz="1400" dirty="0"/>
           </a:p>
@@ -29829,8 +29289,8 @@
         </p:nvSpPr>
         <p:spPr>
           <a:xfrm>
-            <a:off x="4645152" y="3364992"/>
-            <a:ext cx="1097280" cy="475488"/>
+            <a:off x="3959352" y="3364992"/>
+            <a:ext cx="411480" cy="475488"/>
           </a:xfrm>
           <a:prstGeom prst="rect">
             <a:avLst/>
@@ -29868,7 +29328,7 @@
         </p:nvSpPr>
         <p:spPr>
           <a:xfrm>
-            <a:off x="5742432" y="3364992"/>
+            <a:off x="4370832" y="3364992"/>
             <a:ext cx="1645920" cy="475488"/>
           </a:xfrm>
           <a:prstGeom prst="rect">
@@ -29895,7 +29355,7 @@
         </p:nvSpPr>
         <p:spPr>
           <a:xfrm>
-            <a:off x="5742432" y="3364992"/>
+            <a:off x="4370832" y="3364992"/>
             <a:ext cx="1645920" cy="475488"/>
           </a:xfrm>
           <a:prstGeom prst="rect">
@@ -29920,6 +29380,111 @@
                 <a:ea typeface="Trebuchet MS" pitchFamily="34" charset="-122"/>
                 <a:cs typeface="Trebuchet MS" pitchFamily="34" charset="-120"/>
               </a:rPr>
+              <a:t>it</a:t>
+            </a:r>
+            <a:endParaRPr lang="en-US" sz="1400" dirty="0"/>
+          </a:p>
+        </p:txBody>
+      </p:sp>
+      <p:sp>
+        <p:nvSpPr>
+          <p:cNvPr id="30" name="Text 28"/>
+          <p:cNvSpPr/>
+          <p:nvPr/>
+        </p:nvSpPr>
+        <p:spPr>
+          <a:xfrm>
+            <a:off x="6016752" y="3364992"/>
+            <a:ext cx="411480" cy="475488"/>
+          </a:xfrm>
+          <a:prstGeom prst="rect">
+            <a:avLst/>
+          </a:prstGeom>
+          <a:noFill/>
+          <a:ln/>
+        </p:spPr>
+        <p:txBody>
+          <a:bodyPr wrap="square" lIns="0" tIns="0" rIns="0" bIns="0" rtlCol="0" anchor="ctr"/>
+          <a:lstStyle/>
+          <a:p>
+            <a:pPr algn="ctr" indent="0" marL="0">
+              <a:buNone/>
+            </a:pPr>
+            <a:r>
+              <a:rPr lang="en-US" sz="1600" b="1" dirty="0">
+                <a:solidFill>
+                  <a:srgbClr val="0D9488"/>
+                </a:solidFill>
+                <a:latin typeface="Trebuchet MS" pitchFamily="34" charset="0"/>
+                <a:ea typeface="Trebuchet MS" pitchFamily="34" charset="-122"/>
+                <a:cs typeface="Trebuchet MS" pitchFamily="34" charset="-120"/>
+              </a:rPr>
+              <a:t>·</a:t>
+            </a:r>
+            <a:endParaRPr lang="en-US" sz="1600" dirty="0"/>
+          </a:p>
+        </p:txBody>
+      </p:sp>
+      <p:sp>
+        <p:nvSpPr>
+          <p:cNvPr id="31" name="Shape 29"/>
+          <p:cNvSpPr/>
+          <p:nvPr/>
+        </p:nvSpPr>
+        <p:spPr>
+          <a:xfrm>
+            <a:off x="6428232" y="3364992"/>
+            <a:ext cx="1645920" cy="475488"/>
+          </a:xfrm>
+          <a:prstGeom prst="rect">
+            <a:avLst>
+              <a:gd name="adj" fmla="val 9615"/>
+            </a:avLst>
+          </a:prstGeom>
+          <a:solidFill>
+            <a:srgbClr val="FFFFFF"/>
+          </a:solidFill>
+          <a:ln w="12700">
+            <a:solidFill>
+              <a:srgbClr val="0D9488"/>
+            </a:solidFill>
+            <a:prstDash val="solid"/>
+          </a:ln>
+        </p:spPr>
+      </p:sp>
+      <p:sp>
+        <p:nvSpPr>
+          <p:cNvPr id="32" name="Text 30"/>
+          <p:cNvSpPr/>
+          <p:nvPr/>
+        </p:nvSpPr>
+        <p:spPr>
+          <a:xfrm>
+            <a:off x="6428232" y="3364992"/>
+            <a:ext cx="1645920" cy="475488"/>
+          </a:xfrm>
+          <a:prstGeom prst="rect">
+            <a:avLst/>
+          </a:prstGeom>
+          <a:noFill/>
+          <a:ln/>
+        </p:spPr>
+        <p:txBody>
+          <a:bodyPr wrap="square" lIns="0" tIns="0" rIns="0" bIns="0" rtlCol="0" anchor="ctr"/>
+          <a:lstStyle/>
+          <a:p>
+            <a:pPr algn="ctr" indent="0" marL="0">
+              <a:buNone/>
+            </a:pPr>
+            <a:r>
+              <a:rPr lang="en-US" sz="1400" b="1" dirty="0">
+                <a:solidFill>
+                  <a:srgbClr val="0D9488"/>
+                </a:solidFill>
+                <a:latin typeface="Trebuchet MS" pitchFamily="34" charset="0"/>
+                <a:ea typeface="Trebuchet MS" pitchFamily="34" charset="-122"/>
+                <a:cs typeface="Trebuchet MS" pitchFamily="34" charset="-120"/>
+              </a:rPr>
               <a:t>age</a:t>
             </a:r>
             <a:endParaRPr lang="en-US" sz="1400" dirty="0"/>
@@ -29928,7 +29493,7 @@
       </p:sp>
       <p:sp>
         <p:nvSpPr>
-          <p:cNvPr id="30" name="Shape 28"/>
+          <p:cNvPr id="33" name="Shape 31"/>
           <p:cNvSpPr/>
           <p:nvPr/>
         </p:nvSpPr>
@@ -29955,7 +29520,7 @@
       </p:sp>
       <p:sp>
         <p:nvSpPr>
-          <p:cNvPr id="31" name="Text 29"/>
+          <p:cNvPr id="34" name="Text 32"/>
           <p:cNvSpPr/>
           <p:nvPr/>
         </p:nvSpPr>
@@ -29994,7 +29559,7 @@
       </p:sp>
       <p:sp>
         <p:nvSpPr>
-          <p:cNvPr id="32" name="Shape 30"/>
+          <p:cNvPr id="35" name="Shape 33"/>
           <p:cNvSpPr/>
           <p:nvPr/>
         </p:nvSpPr>
@@ -30021,7 +29586,7 @@
       </p:sp>
       <p:sp>
         <p:nvSpPr>
-          <p:cNvPr id="33" name="Text 31"/>
+          <p:cNvPr id="36" name="Text 34"/>
           <p:cNvSpPr/>
           <p:nvPr/>
         </p:nvSpPr>
@@ -30344,7 +29909,7 @@
                 <a:ea typeface="Calibri" pitchFamily="34" charset="-122"/>
                 <a:cs typeface="Calibri" pitchFamily="34" charset="-120"/>
               </a:rPr>
-              <a:t>Word Labs  •  wordlabs.app  •  Suffix: '-age' = state, collection, or process</a:t>
+              <a:t>Word Labs  •  wordlabs.app  •  Suffix: '-age' = state, process, or collection</a:t>
             </a:r>
             <a:endParaRPr lang="en-US" sz="800" dirty="0"/>
           </a:p>
@@ -30483,7 +30048,7 @@
                 <a:ea typeface="Trebuchet MS" pitchFamily="34" charset="-122"/>
                 <a:cs typeface="Trebuchet MS" pitchFamily="34" charset="-120"/>
               </a:rPr>
-              <a:t>courage</a:t>
+              <a:t>heritage</a:t>
             </a:r>
             <a:endParaRPr lang="en-US" sz="2800" dirty="0"/>
           </a:p>
@@ -30622,7 +30187,7 @@
                 <a:ea typeface="Trebuchet MS" pitchFamily="34" charset="-122"/>
                 <a:cs typeface="Trebuchet MS" pitchFamily="34" charset="-120"/>
               </a:rPr>
-              <a:t>cour</a:t>
+              <a:t>herit</a:t>
             </a:r>
             <a:endParaRPr lang="en-US" sz="1300" dirty="0"/>
           </a:p>
@@ -30661,7 +30226,7 @@
                 <a:ea typeface="Calibri" pitchFamily="34" charset="-122"/>
                 <a:cs typeface="Calibri" pitchFamily="34" charset="-120"/>
               </a:rPr>
-              <a:t>heart (Latin: cor)</a:t>
+              <a:t>inherit or pass down</a:t>
             </a:r>
             <a:endParaRPr lang="en-US" sz="850" dirty="0"/>
           </a:p>
@@ -30773,7 +30338,7 @@
                 <a:ea typeface="Calibri" pitchFamily="34" charset="-122"/>
                 <a:cs typeface="Calibri" pitchFamily="34" charset="-120"/>
               </a:rPr>
-              <a:t>state or quality of</a:t>
+              <a:t>state or condition</a:t>
             </a:r>
             <a:endParaRPr lang="en-US" sz="850" dirty="0"/>
           </a:p>
@@ -30880,7 +30445,7 @@
         </p:nvSpPr>
         <p:spPr>
           <a:xfrm>
-            <a:off x="2999232" y="3364992"/>
+            <a:off x="2313432" y="3364992"/>
             <a:ext cx="1645920" cy="475488"/>
           </a:xfrm>
           <a:prstGeom prst="rect">
@@ -30907,7 +30472,7 @@
         </p:nvSpPr>
         <p:spPr>
           <a:xfrm>
-            <a:off x="2999232" y="3364992"/>
+            <a:off x="2313432" y="3364992"/>
             <a:ext cx="1645920" cy="475488"/>
           </a:xfrm>
           <a:prstGeom prst="rect">
@@ -30932,7 +30497,7 @@
                 <a:ea typeface="Trebuchet MS" pitchFamily="34" charset="-122"/>
                 <a:cs typeface="Trebuchet MS" pitchFamily="34" charset="-120"/>
               </a:rPr>
-              <a:t>cour</a:t>
+              <a:t>her</a:t>
             </a:r>
             <a:endParaRPr lang="en-US" sz="1400" dirty="0"/>
           </a:p>
@@ -30946,8 +30511,8 @@
         </p:nvSpPr>
         <p:spPr>
           <a:xfrm>
-            <a:off x="4645152" y="3364992"/>
-            <a:ext cx="1097280" cy="475488"/>
+            <a:off x="3959352" y="3364992"/>
+            <a:ext cx="411480" cy="475488"/>
           </a:xfrm>
           <a:prstGeom prst="rect">
             <a:avLst/>
@@ -30985,7 +30550,7 @@
         </p:nvSpPr>
         <p:spPr>
           <a:xfrm>
-            <a:off x="5742432" y="3364992"/>
+            <a:off x="4370832" y="3364992"/>
             <a:ext cx="1645920" cy="475488"/>
           </a:xfrm>
           <a:prstGeom prst="rect">
@@ -31012,7 +30577,7 @@
         </p:nvSpPr>
         <p:spPr>
           <a:xfrm>
-            <a:off x="5742432" y="3364992"/>
+            <a:off x="4370832" y="3364992"/>
             <a:ext cx="1645920" cy="475488"/>
           </a:xfrm>
           <a:prstGeom prst="rect">
@@ -31037,6 +30602,111 @@
                 <a:ea typeface="Trebuchet MS" pitchFamily="34" charset="-122"/>
                 <a:cs typeface="Trebuchet MS" pitchFamily="34" charset="-120"/>
               </a:rPr>
+              <a:t>it</a:t>
+            </a:r>
+            <a:endParaRPr lang="en-US" sz="1400" dirty="0"/>
+          </a:p>
+        </p:txBody>
+      </p:sp>
+      <p:sp>
+        <p:nvSpPr>
+          <p:cNvPr id="30" name="Text 28"/>
+          <p:cNvSpPr/>
+          <p:nvPr/>
+        </p:nvSpPr>
+        <p:spPr>
+          <a:xfrm>
+            <a:off x="6016752" y="3364992"/>
+            <a:ext cx="411480" cy="475488"/>
+          </a:xfrm>
+          <a:prstGeom prst="rect">
+            <a:avLst/>
+          </a:prstGeom>
+          <a:noFill/>
+          <a:ln/>
+        </p:spPr>
+        <p:txBody>
+          <a:bodyPr wrap="square" lIns="0" tIns="0" rIns="0" bIns="0" rtlCol="0" anchor="ctr"/>
+          <a:lstStyle/>
+          <a:p>
+            <a:pPr algn="ctr" indent="0" marL="0">
+              <a:buNone/>
+            </a:pPr>
+            <a:r>
+              <a:rPr lang="en-US" sz="1600" b="1" dirty="0">
+                <a:solidFill>
+                  <a:srgbClr val="0D9488"/>
+                </a:solidFill>
+                <a:latin typeface="Trebuchet MS" pitchFamily="34" charset="0"/>
+                <a:ea typeface="Trebuchet MS" pitchFamily="34" charset="-122"/>
+                <a:cs typeface="Trebuchet MS" pitchFamily="34" charset="-120"/>
+              </a:rPr>
+              <a:t>·</a:t>
+            </a:r>
+            <a:endParaRPr lang="en-US" sz="1600" dirty="0"/>
+          </a:p>
+        </p:txBody>
+      </p:sp>
+      <p:sp>
+        <p:nvSpPr>
+          <p:cNvPr id="31" name="Shape 29"/>
+          <p:cNvSpPr/>
+          <p:nvPr/>
+        </p:nvSpPr>
+        <p:spPr>
+          <a:xfrm>
+            <a:off x="6428232" y="3364992"/>
+            <a:ext cx="1645920" cy="475488"/>
+          </a:xfrm>
+          <a:prstGeom prst="rect">
+            <a:avLst>
+              <a:gd name="adj" fmla="val 9615"/>
+            </a:avLst>
+          </a:prstGeom>
+          <a:solidFill>
+            <a:srgbClr val="FFFFFF"/>
+          </a:solidFill>
+          <a:ln w="12700">
+            <a:solidFill>
+              <a:srgbClr val="0D9488"/>
+            </a:solidFill>
+            <a:prstDash val="solid"/>
+          </a:ln>
+        </p:spPr>
+      </p:sp>
+      <p:sp>
+        <p:nvSpPr>
+          <p:cNvPr id="32" name="Text 30"/>
+          <p:cNvSpPr/>
+          <p:nvPr/>
+        </p:nvSpPr>
+        <p:spPr>
+          <a:xfrm>
+            <a:off x="6428232" y="3364992"/>
+            <a:ext cx="1645920" cy="475488"/>
+          </a:xfrm>
+          <a:prstGeom prst="rect">
+            <a:avLst/>
+          </a:prstGeom>
+          <a:noFill/>
+          <a:ln/>
+        </p:spPr>
+        <p:txBody>
+          <a:bodyPr wrap="square" lIns="0" tIns="0" rIns="0" bIns="0" rtlCol="0" anchor="ctr"/>
+          <a:lstStyle/>
+          <a:p>
+            <a:pPr algn="ctr" indent="0" marL="0">
+              <a:buNone/>
+            </a:pPr>
+            <a:r>
+              <a:rPr lang="en-US" sz="1400" b="1" dirty="0">
+                <a:solidFill>
+                  <a:srgbClr val="0D9488"/>
+                </a:solidFill>
+                <a:latin typeface="Trebuchet MS" pitchFamily="34" charset="0"/>
+                <a:ea typeface="Trebuchet MS" pitchFamily="34" charset="-122"/>
+                <a:cs typeface="Trebuchet MS" pitchFamily="34" charset="-120"/>
+              </a:rPr>
               <a:t>age</a:t>
             </a:r>
             <a:endParaRPr lang="en-US" sz="1400" dirty="0"/>
@@ -31045,7 +30715,7 @@
       </p:sp>
       <p:sp>
         <p:nvSpPr>
-          <p:cNvPr id="30" name="Shape 28"/>
+          <p:cNvPr id="33" name="Shape 31"/>
           <p:cNvSpPr/>
           <p:nvPr/>
         </p:nvSpPr>
@@ -31072,7 +30742,7 @@
       </p:sp>
       <p:sp>
         <p:nvSpPr>
-          <p:cNvPr id="31" name="Text 29"/>
+          <p:cNvPr id="34" name="Text 32"/>
           <p:cNvSpPr/>
           <p:nvPr/>
         </p:nvSpPr>
@@ -31111,7 +30781,7 @@
       </p:sp>
       <p:sp>
         <p:nvSpPr>
-          <p:cNvPr id="32" name="Shape 30"/>
+          <p:cNvPr id="35" name="Shape 33"/>
           <p:cNvSpPr/>
           <p:nvPr/>
         </p:nvSpPr>
@@ -31138,7 +30808,7 @@
       </p:sp>
       <p:sp>
         <p:nvSpPr>
-          <p:cNvPr id="33" name="Shape 31"/>
+          <p:cNvPr id="36" name="Shape 34"/>
           <p:cNvSpPr/>
           <p:nvPr/>
         </p:nvSpPr>
@@ -31165,7 +30835,7 @@
       </p:sp>
       <p:sp>
         <p:nvSpPr>
-          <p:cNvPr id="34" name="Text 32"/>
+          <p:cNvPr id="37" name="Text 35"/>
           <p:cNvSpPr/>
           <p:nvPr/>
         </p:nvSpPr>
@@ -31196,7 +30866,7 @@
                 <a:ea typeface="Trebuchet MS" pitchFamily="34" charset="-122"/>
                 <a:cs typeface="Trebuchet MS" pitchFamily="34" charset="-120"/>
               </a:rPr>
-              <a:t>c</a:t>
+              <a:t>h</a:t>
             </a:r>
             <a:endParaRPr lang="en-US" sz="900" dirty="0"/>
           </a:p>
@@ -31204,13 +30874,277 @@
       </p:sp>
       <p:sp>
         <p:nvSpPr>
-          <p:cNvPr id="35" name="Text 33"/>
-          <p:cNvSpPr/>
-          <p:nvPr/>
-        </p:nvSpPr>
-        <p:spPr>
-          <a:xfrm>
-            <a:off x="2427732" y="4572000"/>
+          <p:cNvPr id="38" name="Shape 36"/>
+          <p:cNvSpPr/>
+          <p:nvPr/>
+        </p:nvSpPr>
+        <p:spPr>
+          <a:xfrm>
+            <a:off x="3639312" y="4169664"/>
+            <a:ext cx="685800" cy="384048"/>
+          </a:xfrm>
+          <a:prstGeom prst="rect">
+            <a:avLst>
+              <a:gd name="adj" fmla="val 9524"/>
+            </a:avLst>
+          </a:prstGeom>
+          <a:solidFill>
+            <a:srgbClr val="FFFFFF"/>
+          </a:solidFill>
+          <a:ln w="12700">
+            <a:solidFill>
+              <a:srgbClr val="DB2777"/>
+            </a:solidFill>
+            <a:prstDash val="solid"/>
+          </a:ln>
+        </p:spPr>
+      </p:sp>
+      <p:sp>
+        <p:nvSpPr>
+          <p:cNvPr id="39" name="Text 37"/>
+          <p:cNvSpPr/>
+          <p:nvPr/>
+        </p:nvSpPr>
+        <p:spPr>
+          <a:xfrm>
+            <a:off x="3639312" y="4169664"/>
+            <a:ext cx="685800" cy="384048"/>
+          </a:xfrm>
+          <a:prstGeom prst="rect">
+            <a:avLst/>
+          </a:prstGeom>
+          <a:noFill/>
+          <a:ln/>
+        </p:spPr>
+        <p:txBody>
+          <a:bodyPr wrap="square" lIns="0" tIns="0" rIns="0" bIns="0" rtlCol="0" anchor="ctr"/>
+          <a:lstStyle/>
+          <a:p>
+            <a:pPr algn="ctr" indent="0" marL="0">
+              <a:buNone/>
+            </a:pPr>
+            <a:r>
+              <a:rPr lang="en-US" sz="900" b="1" dirty="0">
+                <a:solidFill>
+                  <a:srgbClr val="9D174D"/>
+                </a:solidFill>
+                <a:latin typeface="Trebuchet MS" pitchFamily="34" charset="0"/>
+                <a:ea typeface="Trebuchet MS" pitchFamily="34" charset="-122"/>
+                <a:cs typeface="Trebuchet MS" pitchFamily="34" charset="-120"/>
+              </a:rPr>
+              <a:t>er</a:t>
+            </a:r>
+            <a:endParaRPr lang="en-US" sz="900" dirty="0"/>
+          </a:p>
+        </p:txBody>
+      </p:sp>
+      <p:sp>
+        <p:nvSpPr>
+          <p:cNvPr id="40" name="Shape 38"/>
+          <p:cNvSpPr/>
+          <p:nvPr/>
+        </p:nvSpPr>
+        <p:spPr>
+          <a:xfrm>
+            <a:off x="4850892" y="4169664"/>
+            <a:ext cx="685800" cy="384048"/>
+          </a:xfrm>
+          <a:prstGeom prst="rect">
+            <a:avLst>
+              <a:gd name="adj" fmla="val 9524"/>
+            </a:avLst>
+          </a:prstGeom>
+          <a:solidFill>
+            <a:srgbClr val="FFFFFF"/>
+          </a:solidFill>
+          <a:ln w="12700">
+            <a:solidFill>
+              <a:srgbClr val="DB2777"/>
+            </a:solidFill>
+            <a:prstDash val="solid"/>
+          </a:ln>
+        </p:spPr>
+      </p:sp>
+      <p:sp>
+        <p:nvSpPr>
+          <p:cNvPr id="41" name="Text 39"/>
+          <p:cNvSpPr/>
+          <p:nvPr/>
+        </p:nvSpPr>
+        <p:spPr>
+          <a:xfrm>
+            <a:off x="4850892" y="4169664"/>
+            <a:ext cx="685800" cy="384048"/>
+          </a:xfrm>
+          <a:prstGeom prst="rect">
+            <a:avLst/>
+          </a:prstGeom>
+          <a:noFill/>
+          <a:ln/>
+        </p:spPr>
+        <p:txBody>
+          <a:bodyPr wrap="square" lIns="0" tIns="0" rIns="0" bIns="0" rtlCol="0" anchor="ctr"/>
+          <a:lstStyle/>
+          <a:p>
+            <a:pPr algn="ctr" indent="0" marL="0">
+              <a:buNone/>
+            </a:pPr>
+            <a:r>
+              <a:rPr lang="en-US" sz="900" b="1" dirty="0">
+                <a:solidFill>
+                  <a:srgbClr val="9D174D"/>
+                </a:solidFill>
+                <a:latin typeface="Trebuchet MS" pitchFamily="34" charset="0"/>
+                <a:ea typeface="Trebuchet MS" pitchFamily="34" charset="-122"/>
+                <a:cs typeface="Trebuchet MS" pitchFamily="34" charset="-120"/>
+              </a:rPr>
+              <a:t>i</a:t>
+            </a:r>
+            <a:endParaRPr lang="en-US" sz="900" dirty="0"/>
+          </a:p>
+        </p:txBody>
+      </p:sp>
+      <p:sp>
+        <p:nvSpPr>
+          <p:cNvPr id="42" name="Shape 40"/>
+          <p:cNvSpPr/>
+          <p:nvPr/>
+        </p:nvSpPr>
+        <p:spPr>
+          <a:xfrm>
+            <a:off x="6062472" y="4169664"/>
+            <a:ext cx="685800" cy="384048"/>
+          </a:xfrm>
+          <a:prstGeom prst="rect">
+            <a:avLst>
+              <a:gd name="adj" fmla="val 9524"/>
+            </a:avLst>
+          </a:prstGeom>
+          <a:solidFill>
+            <a:srgbClr val="FFFFFF"/>
+          </a:solidFill>
+          <a:ln w="12700">
+            <a:solidFill>
+              <a:srgbClr val="DB2777"/>
+            </a:solidFill>
+            <a:prstDash val="solid"/>
+          </a:ln>
+        </p:spPr>
+      </p:sp>
+      <p:sp>
+        <p:nvSpPr>
+          <p:cNvPr id="43" name="Text 41"/>
+          <p:cNvSpPr/>
+          <p:nvPr/>
+        </p:nvSpPr>
+        <p:spPr>
+          <a:xfrm>
+            <a:off x="6062472" y="4169664"/>
+            <a:ext cx="685800" cy="384048"/>
+          </a:xfrm>
+          <a:prstGeom prst="rect">
+            <a:avLst/>
+          </a:prstGeom>
+          <a:noFill/>
+          <a:ln/>
+        </p:spPr>
+        <p:txBody>
+          <a:bodyPr wrap="square" lIns="0" tIns="0" rIns="0" bIns="0" rtlCol="0" anchor="ctr"/>
+          <a:lstStyle/>
+          <a:p>
+            <a:pPr algn="ctr" indent="0" marL="0">
+              <a:buNone/>
+            </a:pPr>
+            <a:r>
+              <a:rPr lang="en-US" sz="900" b="1" dirty="0">
+                <a:solidFill>
+                  <a:srgbClr val="9D174D"/>
+                </a:solidFill>
+                <a:latin typeface="Trebuchet MS" pitchFamily="34" charset="0"/>
+                <a:ea typeface="Trebuchet MS" pitchFamily="34" charset="-122"/>
+                <a:cs typeface="Trebuchet MS" pitchFamily="34" charset="-120"/>
+              </a:rPr>
+              <a:t>t</a:t>
+            </a:r>
+            <a:endParaRPr lang="en-US" sz="900" dirty="0"/>
+          </a:p>
+        </p:txBody>
+      </p:sp>
+      <p:sp>
+        <p:nvSpPr>
+          <p:cNvPr id="44" name="Shape 42"/>
+          <p:cNvSpPr/>
+          <p:nvPr/>
+        </p:nvSpPr>
+        <p:spPr>
+          <a:xfrm>
+            <a:off x="7274052" y="4169664"/>
+            <a:ext cx="685800" cy="384048"/>
+          </a:xfrm>
+          <a:prstGeom prst="rect">
+            <a:avLst>
+              <a:gd name="adj" fmla="val 9524"/>
+            </a:avLst>
+          </a:prstGeom>
+          <a:solidFill>
+            <a:srgbClr val="FFFFFF"/>
+          </a:solidFill>
+          <a:ln w="12700">
+            <a:solidFill>
+              <a:srgbClr val="DB2777"/>
+            </a:solidFill>
+            <a:prstDash val="solid"/>
+          </a:ln>
+        </p:spPr>
+      </p:sp>
+      <p:sp>
+        <p:nvSpPr>
+          <p:cNvPr id="45" name="Text 43"/>
+          <p:cNvSpPr/>
+          <p:nvPr/>
+        </p:nvSpPr>
+        <p:spPr>
+          <a:xfrm>
+            <a:off x="7274052" y="4169664"/>
+            <a:ext cx="685800" cy="384048"/>
+          </a:xfrm>
+          <a:prstGeom prst="rect">
+            <a:avLst/>
+          </a:prstGeom>
+          <a:noFill/>
+          <a:ln/>
+        </p:spPr>
+        <p:txBody>
+          <a:bodyPr wrap="square" lIns="0" tIns="0" rIns="0" bIns="0" rtlCol="0" anchor="ctr"/>
+          <a:lstStyle/>
+          <a:p>
+            <a:pPr algn="ctr" indent="0" marL="0">
+              <a:buNone/>
+            </a:pPr>
+            <a:r>
+              <a:rPr lang="en-US" sz="900" b="1" dirty="0">
+                <a:solidFill>
+                  <a:srgbClr val="9D174D"/>
+                </a:solidFill>
+                <a:latin typeface="Trebuchet MS" pitchFamily="34" charset="0"/>
+                <a:ea typeface="Trebuchet MS" pitchFamily="34" charset="-122"/>
+                <a:cs typeface="Trebuchet MS" pitchFamily="34" charset="-120"/>
+              </a:rPr>
+              <a:t>age</a:t>
+            </a:r>
+            <a:endParaRPr lang="en-US" sz="900" dirty="0"/>
+          </a:p>
+        </p:txBody>
+      </p:sp>
+      <p:sp>
+        <p:nvSpPr>
+          <p:cNvPr id="46" name="Text 44"/>
+          <p:cNvSpPr/>
+          <p:nvPr/>
+        </p:nvSpPr>
+        <p:spPr>
+          <a:xfrm>
+            <a:off x="7274052" y="4572000"/>
             <a:ext cx="685800" cy="219456"/>
           </a:xfrm>
           <a:prstGeom prst="rect">
@@ -31235,310 +31169,7 @@
                 <a:ea typeface="Calibri" pitchFamily="34" charset="-122"/>
                 <a:cs typeface="Calibri" pitchFamily="34" charset="-120"/>
               </a:rPr>
-              <a:t>/k/</a:t>
-            </a:r>
-            <a:endParaRPr lang="en-US" sz="750" dirty="0"/>
-          </a:p>
-        </p:txBody>
-      </p:sp>
-      <p:sp>
-        <p:nvSpPr>
-          <p:cNvPr id="36" name="Shape 34"/>
-          <p:cNvSpPr/>
-          <p:nvPr/>
-        </p:nvSpPr>
-        <p:spPr>
-          <a:xfrm>
-            <a:off x="3639312" y="4169664"/>
-            <a:ext cx="685800" cy="384048"/>
-          </a:xfrm>
-          <a:prstGeom prst="rect">
-            <a:avLst>
-              <a:gd name="adj" fmla="val 9524"/>
-            </a:avLst>
-          </a:prstGeom>
-          <a:solidFill>
-            <a:srgbClr val="FFFFFF"/>
-          </a:solidFill>
-          <a:ln w="12700">
-            <a:solidFill>
-              <a:srgbClr val="DB2777"/>
-            </a:solidFill>
-            <a:prstDash val="solid"/>
-          </a:ln>
-        </p:spPr>
-      </p:sp>
-      <p:sp>
-        <p:nvSpPr>
-          <p:cNvPr id="37" name="Text 35"/>
-          <p:cNvSpPr/>
-          <p:nvPr/>
-        </p:nvSpPr>
-        <p:spPr>
-          <a:xfrm>
-            <a:off x="3639312" y="4169664"/>
-            <a:ext cx="685800" cy="384048"/>
-          </a:xfrm>
-          <a:prstGeom prst="rect">
-            <a:avLst/>
-          </a:prstGeom>
-          <a:noFill/>
-          <a:ln/>
-        </p:spPr>
-        <p:txBody>
-          <a:bodyPr wrap="square" lIns="0" tIns="0" rIns="0" bIns="0" rtlCol="0" anchor="ctr"/>
-          <a:lstStyle/>
-          <a:p>
-            <a:pPr algn="ctr" indent="0" marL="0">
-              <a:buNone/>
-            </a:pPr>
-            <a:r>
-              <a:rPr lang="en-US" sz="900" b="1" dirty="0">
-                <a:solidFill>
-                  <a:srgbClr val="9D174D"/>
-                </a:solidFill>
-                <a:latin typeface="Trebuchet MS" pitchFamily="34" charset="0"/>
-                <a:ea typeface="Trebuchet MS" pitchFamily="34" charset="-122"/>
-                <a:cs typeface="Trebuchet MS" pitchFamily="34" charset="-120"/>
-              </a:rPr>
-              <a:t>ou</a:t>
-            </a:r>
-            <a:endParaRPr lang="en-US" sz="900" dirty="0"/>
-          </a:p>
-        </p:txBody>
-      </p:sp>
-      <p:sp>
-        <p:nvSpPr>
-          <p:cNvPr id="38" name="Shape 36"/>
-          <p:cNvSpPr/>
-          <p:nvPr/>
-        </p:nvSpPr>
-        <p:spPr>
-          <a:xfrm>
-            <a:off x="4850892" y="4169664"/>
-            <a:ext cx="685800" cy="384048"/>
-          </a:xfrm>
-          <a:prstGeom prst="rect">
-            <a:avLst>
-              <a:gd name="adj" fmla="val 9524"/>
-            </a:avLst>
-          </a:prstGeom>
-          <a:solidFill>
-            <a:srgbClr val="FFFFFF"/>
-          </a:solidFill>
-          <a:ln w="12700">
-            <a:solidFill>
-              <a:srgbClr val="DB2777"/>
-            </a:solidFill>
-            <a:prstDash val="solid"/>
-          </a:ln>
-        </p:spPr>
-      </p:sp>
-      <p:sp>
-        <p:nvSpPr>
-          <p:cNvPr id="39" name="Text 37"/>
-          <p:cNvSpPr/>
-          <p:nvPr/>
-        </p:nvSpPr>
-        <p:spPr>
-          <a:xfrm>
-            <a:off x="4850892" y="4169664"/>
-            <a:ext cx="685800" cy="384048"/>
-          </a:xfrm>
-          <a:prstGeom prst="rect">
-            <a:avLst/>
-          </a:prstGeom>
-          <a:noFill/>
-          <a:ln/>
-        </p:spPr>
-        <p:txBody>
-          <a:bodyPr wrap="square" lIns="0" tIns="0" rIns="0" bIns="0" rtlCol="0" anchor="ctr"/>
-          <a:lstStyle/>
-          <a:p>
-            <a:pPr algn="ctr" indent="0" marL="0">
-              <a:buNone/>
-            </a:pPr>
-            <a:r>
-              <a:rPr lang="en-US" sz="900" b="1" dirty="0">
-                <a:solidFill>
-                  <a:srgbClr val="9D174D"/>
-                </a:solidFill>
-                <a:latin typeface="Trebuchet MS" pitchFamily="34" charset="0"/>
-                <a:ea typeface="Trebuchet MS" pitchFamily="34" charset="-122"/>
-                <a:cs typeface="Trebuchet MS" pitchFamily="34" charset="-120"/>
-              </a:rPr>
-              <a:t>r</a:t>
-            </a:r>
-            <a:endParaRPr lang="en-US" sz="900" dirty="0"/>
-          </a:p>
-        </p:txBody>
-      </p:sp>
-      <p:sp>
-        <p:nvSpPr>
-          <p:cNvPr id="40" name="Shape 38"/>
-          <p:cNvSpPr/>
-          <p:nvPr/>
-        </p:nvSpPr>
-        <p:spPr>
-          <a:xfrm>
-            <a:off x="6062472" y="4169664"/>
-            <a:ext cx="685800" cy="384048"/>
-          </a:xfrm>
-          <a:prstGeom prst="rect">
-            <a:avLst>
-              <a:gd name="adj" fmla="val 9524"/>
-            </a:avLst>
-          </a:prstGeom>
-          <a:solidFill>
-            <a:srgbClr val="FFFFFF"/>
-          </a:solidFill>
-          <a:ln w="12700">
-            <a:solidFill>
-              <a:srgbClr val="DB2777"/>
-            </a:solidFill>
-            <a:prstDash val="solid"/>
-          </a:ln>
-        </p:spPr>
-      </p:sp>
-      <p:sp>
-        <p:nvSpPr>
-          <p:cNvPr id="41" name="Text 39"/>
-          <p:cNvSpPr/>
-          <p:nvPr/>
-        </p:nvSpPr>
-        <p:spPr>
-          <a:xfrm>
-            <a:off x="6062472" y="4169664"/>
-            <a:ext cx="685800" cy="384048"/>
-          </a:xfrm>
-          <a:prstGeom prst="rect">
-            <a:avLst/>
-          </a:prstGeom>
-          <a:noFill/>
-          <a:ln/>
-        </p:spPr>
-        <p:txBody>
-          <a:bodyPr wrap="square" lIns="0" tIns="0" rIns="0" bIns="0" rtlCol="0" anchor="ctr"/>
-          <a:lstStyle/>
-          <a:p>
-            <a:pPr algn="ctr" indent="0" marL="0">
-              <a:buNone/>
-            </a:pPr>
-            <a:r>
-              <a:rPr lang="en-US" sz="900" b="1" dirty="0">
-                <a:solidFill>
-                  <a:srgbClr val="9D174D"/>
-                </a:solidFill>
-                <a:latin typeface="Trebuchet MS" pitchFamily="34" charset="0"/>
-                <a:ea typeface="Trebuchet MS" pitchFamily="34" charset="-122"/>
-                <a:cs typeface="Trebuchet MS" pitchFamily="34" charset="-120"/>
-              </a:rPr>
-              <a:t>i</a:t>
-            </a:r>
-            <a:endParaRPr lang="en-US" sz="900" dirty="0"/>
-          </a:p>
-        </p:txBody>
-      </p:sp>
-      <p:sp>
-        <p:nvSpPr>
-          <p:cNvPr id="42" name="Shape 40"/>
-          <p:cNvSpPr/>
-          <p:nvPr/>
-        </p:nvSpPr>
-        <p:spPr>
-          <a:xfrm>
-            <a:off x="7274052" y="4169664"/>
-            <a:ext cx="685800" cy="384048"/>
-          </a:xfrm>
-          <a:prstGeom prst="rect">
-            <a:avLst>
-              <a:gd name="adj" fmla="val 9524"/>
-            </a:avLst>
-          </a:prstGeom>
-          <a:solidFill>
-            <a:srgbClr val="FFFFFF"/>
-          </a:solidFill>
-          <a:ln w="12700">
-            <a:solidFill>
-              <a:srgbClr val="DB2777"/>
-            </a:solidFill>
-            <a:prstDash val="solid"/>
-          </a:ln>
-        </p:spPr>
-      </p:sp>
-      <p:sp>
-        <p:nvSpPr>
-          <p:cNvPr id="43" name="Text 41"/>
-          <p:cNvSpPr/>
-          <p:nvPr/>
-        </p:nvSpPr>
-        <p:spPr>
-          <a:xfrm>
-            <a:off x="7274052" y="4169664"/>
-            <a:ext cx="685800" cy="384048"/>
-          </a:xfrm>
-          <a:prstGeom prst="rect">
-            <a:avLst/>
-          </a:prstGeom>
-          <a:noFill/>
-          <a:ln/>
-        </p:spPr>
-        <p:txBody>
-          <a:bodyPr wrap="square" lIns="0" tIns="0" rIns="0" bIns="0" rtlCol="0" anchor="ctr"/>
-          <a:lstStyle/>
-          <a:p>
-            <a:pPr algn="ctr" indent="0" marL="0">
-              <a:buNone/>
-            </a:pPr>
-            <a:r>
-              <a:rPr lang="en-US" sz="900" b="1" dirty="0">
-                <a:solidFill>
-                  <a:srgbClr val="9D174D"/>
-                </a:solidFill>
-                <a:latin typeface="Trebuchet MS" pitchFamily="34" charset="0"/>
-                <a:ea typeface="Trebuchet MS" pitchFamily="34" charset="-122"/>
-                <a:cs typeface="Trebuchet MS" pitchFamily="34" charset="-120"/>
-              </a:rPr>
-              <a:t>ge</a:t>
-            </a:r>
-            <a:endParaRPr lang="en-US" sz="900" dirty="0"/>
-          </a:p>
-        </p:txBody>
-      </p:sp>
-      <p:sp>
-        <p:nvSpPr>
-          <p:cNvPr id="44" name="Text 42"/>
-          <p:cNvSpPr/>
-          <p:nvPr/>
-        </p:nvSpPr>
-        <p:spPr>
-          <a:xfrm>
-            <a:off x="7274052" y="4572000"/>
-            <a:ext cx="685800" cy="219456"/>
-          </a:xfrm>
-          <a:prstGeom prst="rect">
-            <a:avLst/>
-          </a:prstGeom>
-          <a:noFill/>
-          <a:ln/>
-        </p:spPr>
-        <p:txBody>
-          <a:bodyPr wrap="square" lIns="0" tIns="0" rIns="0" bIns="0" rtlCol="0" anchor="t"/>
-          <a:lstStyle/>
-          <a:p>
-            <a:pPr algn="ctr" indent="0" marL="0">
-              <a:buNone/>
-            </a:pPr>
-            <a:r>
-              <a:rPr lang="en-US" sz="750" i="1" dirty="0">
-                <a:solidFill>
-                  <a:srgbClr val="94A3B8"/>
-                </a:solidFill>
-                <a:latin typeface="Calibri" pitchFamily="34" charset="0"/>
-                <a:ea typeface="Calibri" pitchFamily="34" charset="-122"/>
-                <a:cs typeface="Calibri" pitchFamily="34" charset="-120"/>
-              </a:rPr>
-              <a:t>/j/</a:t>
+              <a:t>/ij/</a:t>
             </a:r>
             <a:endParaRPr lang="en-US" sz="750" dirty="0"/>
           </a:p>
@@ -31830,7 +31461,7 @@
                 <a:ea typeface="Calibri" pitchFamily="34" charset="-122"/>
                 <a:cs typeface="Calibri" pitchFamily="34" charset="-120"/>
               </a:rPr>
-              <a:t>Word Labs  •  wordlabs.app  •  Suffix: '-age' = state, collection, or process</a:t>
+              <a:t>Word Labs  •  wordlabs.app  •  Suffix: '-age' = state, process, or collection</a:t>
             </a:r>
             <a:endParaRPr lang="en-US" sz="800" dirty="0"/>
           </a:p>
@@ -32999,7 +32630,7 @@
                 <a:ea typeface="Calibri" pitchFamily="34" charset="-122"/>
                 <a:cs typeface="Calibri" pitchFamily="34" charset="-120"/>
               </a:rPr>
-              <a:t>Word Labs  •  wordlabs.app  •  Suffix: '-age' = state, collection, or process</a:t>
+              <a:t>Word Labs  •  wordlabs.app  •  Suffix: '-age' = state, process, or collection</a:t>
             </a:r>
             <a:endParaRPr lang="en-US" sz="800" dirty="0"/>
           </a:p>
@@ -33364,7 +32995,7 @@
                 <a:ea typeface="Trebuchet MS" pitchFamily="34" charset="-122"/>
                 <a:cs typeface="Trebuchet MS" pitchFamily="34" charset="-120"/>
               </a:rPr>
-              <a:t>pack</a:t>
+              <a:t>stor</a:t>
             </a:r>
             <a:endParaRPr lang="en-US" sz="1300" dirty="0"/>
           </a:p>
@@ -33492,7 +33123,7 @@
                 <a:ea typeface="Trebuchet MS" pitchFamily="34" charset="-122"/>
                 <a:cs typeface="Trebuchet MS" pitchFamily="34" charset="-120"/>
               </a:rPr>
-              <a:t>her-</a:t>
+              <a:t>pack-</a:t>
             </a:r>
             <a:endParaRPr lang="en-US" sz="1300" dirty="0"/>
           </a:p>
@@ -33556,7 +33187,7 @@
                 <a:ea typeface="Trebuchet MS" pitchFamily="34" charset="-122"/>
                 <a:cs typeface="Trebuchet MS" pitchFamily="34" charset="-120"/>
               </a:rPr>
-              <a:t>stor</a:t>
+              <a:t>pass</a:t>
             </a:r>
             <a:endParaRPr lang="en-US" sz="1300" dirty="0"/>
           </a:p>
@@ -33645,7 +33276,7 @@
                 <a:ea typeface="Trebuchet MS" pitchFamily="34" charset="-122"/>
                 <a:cs typeface="Trebuchet MS" pitchFamily="34" charset="-120"/>
               </a:rPr>
-              <a:t>pil-</a:t>
+              <a:t>her-</a:t>
             </a:r>
             <a:endParaRPr lang="en-US" sz="1300" dirty="0"/>
           </a:p>
@@ -33709,7 +33340,7 @@
                 <a:ea typeface="Trebuchet MS" pitchFamily="34" charset="-122"/>
                 <a:cs typeface="Trebuchet MS" pitchFamily="34" charset="-120"/>
               </a:rPr>
-              <a:t>drain</a:t>
+              <a:t>pack</a:t>
             </a:r>
             <a:endParaRPr lang="en-US" sz="1300" dirty="0"/>
           </a:p>
@@ -33798,7 +33429,7 @@
                 <a:ea typeface="Trebuchet MS" pitchFamily="34" charset="-122"/>
                 <a:cs typeface="Trebuchet MS" pitchFamily="34" charset="-120"/>
               </a:rPr>
-              <a:t>lin-</a:t>
+              <a:t>band-</a:t>
             </a:r>
             <a:endParaRPr lang="en-US" sz="1300" dirty="0"/>
           </a:p>
@@ -33951,7 +33582,7 @@
                 <a:ea typeface="Trebuchet MS" pitchFamily="34" charset="-122"/>
                 <a:cs typeface="Trebuchet MS" pitchFamily="34" charset="-120"/>
               </a:rPr>
-              <a:t>van-</a:t>
+              <a:t>pass-</a:t>
             </a:r>
             <a:endParaRPr lang="en-US" sz="1300" dirty="0"/>
           </a:p>
@@ -34015,7 +33646,7 @@
                 <a:ea typeface="Trebuchet MS" pitchFamily="34" charset="-122"/>
                 <a:cs typeface="Trebuchet MS" pitchFamily="34" charset="-120"/>
               </a:rPr>
-              <a:t>pass</a:t>
+              <a:t>cov</a:t>
             </a:r>
             <a:endParaRPr lang="en-US" sz="1300" dirty="0"/>
           </a:p>
@@ -34145,7 +33776,7 @@
                 <a:ea typeface="Trebuchet MS" pitchFamily="34" charset="-122"/>
                 <a:cs typeface="Trebuchet MS" pitchFamily="34" charset="-120"/>
               </a:rPr>
-              <a:t>package</a:t>
+              <a:t>storage</a:t>
             </a:r>
             <a:endParaRPr lang="en-US" sz="1200" dirty="0"/>
           </a:p>
@@ -34211,7 +33842,7 @@
                 <a:ea typeface="Trebuchet MS" pitchFamily="34" charset="-122"/>
                 <a:cs typeface="Trebuchet MS" pitchFamily="34" charset="-120"/>
               </a:rPr>
-              <a:t>storage</a:t>
+              <a:t>package</a:t>
             </a:r>
             <a:endParaRPr lang="en-US" sz="1200" dirty="0"/>
           </a:p>
@@ -34277,7 +33908,7 @@
                 <a:ea typeface="Trebuchet MS" pitchFamily="34" charset="-122"/>
                 <a:cs typeface="Trebuchet MS" pitchFamily="34" charset="-120"/>
               </a:rPr>
-              <a:t>drainage</a:t>
+              <a:t>passage</a:t>
             </a:r>
             <a:endParaRPr lang="en-US" sz="1200" dirty="0"/>
           </a:p>
@@ -34409,7 +34040,7 @@
                 <a:ea typeface="Trebuchet MS" pitchFamily="34" charset="-122"/>
                 <a:cs typeface="Trebuchet MS" pitchFamily="34" charset="-120"/>
               </a:rPr>
-              <a:t>passage</a:t>
+              <a:t>coverage</a:t>
             </a:r>
             <a:endParaRPr lang="en-US" sz="1200" dirty="0"/>
           </a:p>
@@ -34475,7 +34106,7 @@
                 <a:ea typeface="Trebuchet MS" pitchFamily="34" charset="-122"/>
                 <a:cs typeface="Trebuchet MS" pitchFamily="34" charset="-120"/>
               </a:rPr>
-              <a:t>village</a:t>
+              <a:t>heritage</a:t>
             </a:r>
             <a:endParaRPr lang="en-US" sz="1200" dirty="0"/>
           </a:p>
@@ -34541,7 +34172,7 @@
                 <a:ea typeface="Trebuchet MS" pitchFamily="34" charset="-122"/>
                 <a:cs typeface="Trebuchet MS" pitchFamily="34" charset="-120"/>
               </a:rPr>
-              <a:t>courage</a:t>
+              <a:t>shortage</a:t>
             </a:r>
             <a:endParaRPr lang="en-US" sz="1200" dirty="0"/>
           </a:p>
@@ -34607,7 +34238,7 @@
                 <a:ea typeface="Trebuchet MS" pitchFamily="34" charset="-122"/>
                 <a:cs typeface="Trebuchet MS" pitchFamily="34" charset="-120"/>
               </a:rPr>
-              <a:t>heritage</a:t>
+              <a:t>village</a:t>
             </a:r>
             <a:endParaRPr lang="en-US" sz="1200" dirty="0"/>
           </a:p>
@@ -34899,7 +34530,7 @@
                 <a:ea typeface="Calibri" pitchFamily="34" charset="-122"/>
                 <a:cs typeface="Calibri" pitchFamily="34" charset="-120"/>
               </a:rPr>
-              <a:t>Word Labs  •  wordlabs.app  •  Suffix: '-age' = state, collection, or process</a:t>
+              <a:t>Word Labs  •  wordlabs.app  •  Suffix: '-age' = state, process, or collection</a:t>
             </a:r>
             <a:endParaRPr lang="en-US" sz="800" dirty="0"/>
           </a:p>
@@ -35063,7 +34694,7 @@
                 <a:ea typeface="Calibri" pitchFamily="34" charset="-122"/>
                 <a:cs typeface="Calibri" pitchFamily="34" charset="-120"/>
               </a:rPr>
-              <a:t>A meaningful word part added to the end of a word to change its meaning or form. The suffix '-age' means 'state, collection, or process'.</a:t>
+              <a:t>A meaningful word part added to the end of a word to change its meaning or form. The suffix '-age' means 'state, process, or collection'.</a:t>
             </a:r>
             <a:endParaRPr lang="en-US" sz="1350" dirty="0"/>
           </a:p>
@@ -35227,7 +34858,7 @@
                 <a:ea typeface="Calibri" pitchFamily="34" charset="-122"/>
                 <a:cs typeface="Calibri" pitchFamily="34" charset="-120"/>
               </a:rPr>
-              <a:t>The core part of a word carrying its basic meaning. In 'package', the root is the part before the suffix '-age'.</a:t>
+              <a:t>The core part of a word carrying its basic meaning. In 'storage', the root is the part before the suffix '-age'.</a:t>
             </a:r>
             <a:endParaRPr lang="en-US" sz="1350" dirty="0"/>
           </a:p>
@@ -35391,7 +35022,7 @@
                 <a:ea typeface="Calibri" pitchFamily="34" charset="-122"/>
                 <a:cs typeface="Calibri" pitchFamily="34" charset="-120"/>
               </a:rPr>
-              <a:t>A meaningful word part added to the beginning of a root to change its meaning. E.g. 'un-' in 'storage' means 'not'.</a:t>
+              <a:t>A meaningful word part added to the beginning of a root to change its meaning. E.g. 'un-' in 'package' means 'not'.</a:t>
             </a:r>
             <a:endParaRPr lang="en-US" sz="1350" dirty="0"/>
           </a:p>
@@ -35683,7 +35314,7 @@
                 <a:ea typeface="Calibri" pitchFamily="34" charset="-122"/>
                 <a:cs typeface="Calibri" pitchFamily="34" charset="-120"/>
               </a:rPr>
-              <a:t>Word Labs  •  wordlabs.app  •  Suffix: '-age' = state, collection, or process</a:t>
+              <a:t>Word Labs  •  wordlabs.app  •  Suffix: '-age' = state, process, or collection</a:t>
             </a:r>
             <a:endParaRPr lang="en-US" sz="800" dirty="0"/>
           </a:p>
@@ -35795,7 +35426,7 @@
                 <a:ea typeface="Calibri" pitchFamily="34" charset="-122"/>
                 <a:cs typeface="Calibri" pitchFamily="34" charset="-120"/>
               </a:rPr>
-              <a:t>1.  The suffix '-age' can mean a state or condition, such as in the word 'courage'.</a:t>
+              <a:t>1.  The suffix '-age' always makes a word mean 'full of something'.</a:t>
             </a:r>
             <a:endParaRPr lang="en-US" sz="1300" dirty="0"/>
           </a:p>
@@ -35818,11 +35449,11 @@
             </a:avLst>
           </a:prstGeom>
           <a:solidFill>
-            <a:srgbClr val="DCFCE7"/>
-          </a:solidFill>
-          <a:ln w="12700">
-            <a:solidFill>
-              <a:srgbClr val="16A34A"/>
+            <a:srgbClr val="FEE2E2"/>
+          </a:solidFill>
+          <a:ln w="12700">
+            <a:solidFill>
+              <a:srgbClr val="DC2626"/>
             </a:solidFill>
             <a:prstDash val="solid"/>
           </a:ln>
@@ -35855,13 +35486,13 @@
             <a:r>
               <a:rPr lang="en-US" sz="1100" b="1" dirty="0">
                 <a:solidFill>
-                  <a:srgbClr val="16A34A"/>
+                  <a:srgbClr val="DC2626"/>
                 </a:solidFill>
                 <a:latin typeface="Trebuchet MS" pitchFamily="34" charset="0"/>
                 <a:ea typeface="Trebuchet MS" pitchFamily="34" charset="-122"/>
                 <a:cs typeface="Trebuchet MS" pitchFamily="34" charset="-120"/>
               </a:rPr>
-              <a:t>TRUE</a:t>
+              <a:t>FALSE</a:t>
             </a:r>
             <a:endParaRPr lang="en-US" sz="1100" dirty="0"/>
           </a:p>
@@ -35934,7 +35565,7 @@
                 <a:ea typeface="Calibri" pitchFamily="34" charset="-122"/>
                 <a:cs typeface="Calibri" pitchFamily="34" charset="-120"/>
               </a:rPr>
-              <a:t>2.  The suffix '-age' always means 'full of something'.</a:t>
+              <a:t>2.  The suffix '-age' comes originally from Latin.</a:t>
             </a:r>
             <a:endParaRPr lang="en-US" sz="1300" dirty="0"/>
           </a:p>
@@ -35957,11 +35588,11 @@
             </a:avLst>
           </a:prstGeom>
           <a:solidFill>
-            <a:srgbClr val="FEE2E2"/>
-          </a:solidFill>
-          <a:ln w="12700">
-            <a:solidFill>
-              <a:srgbClr val="DC2626"/>
+            <a:srgbClr val="DCFCE7"/>
+          </a:solidFill>
+          <a:ln w="12700">
+            <a:solidFill>
+              <a:srgbClr val="16A34A"/>
             </a:solidFill>
             <a:prstDash val="solid"/>
           </a:ln>
@@ -35994,13 +35625,13 @@
             <a:r>
               <a:rPr lang="en-US" sz="1100" b="1" dirty="0">
                 <a:solidFill>
-                  <a:srgbClr val="DC2626"/>
+                  <a:srgbClr val="16A34A"/>
                 </a:solidFill>
                 <a:latin typeface="Trebuchet MS" pitchFamily="34" charset="0"/>
                 <a:ea typeface="Trebuchet MS" pitchFamily="34" charset="-122"/>
                 <a:cs typeface="Trebuchet MS" pitchFamily="34" charset="-120"/>
               </a:rPr>
-              <a:t>FALSE</a:t>
+              <a:t>TRUE</a:t>
             </a:r>
             <a:endParaRPr lang="en-US" sz="1100" dirty="0"/>
           </a:p>
@@ -36073,7 +35704,7 @@
                 <a:ea typeface="Calibri" pitchFamily="34" charset="-122"/>
                 <a:cs typeface="Calibri" pitchFamily="34" charset="-120"/>
               </a:rPr>
-              <a:t>3.  The word 'storage' contains the suffix '-age' attached to the base word 'stor'.</a:t>
+              <a:t>3.  The word 'package' contains the suffix '-age'.</a:t>
             </a:r>
             <a:endParaRPr lang="en-US" sz="1300" dirty="0"/>
           </a:p>
@@ -36212,7 +35843,7 @@
                 <a:ea typeface="Calibri" pitchFamily="34" charset="-122"/>
                 <a:cs typeface="Calibri" pitchFamily="34" charset="-120"/>
               </a:rPr>
-              <a:t>4.  The suffix '-age' comes originally from Latin.</a:t>
+              <a:t>4.  Every word ending in '-age' is a verb.</a:t>
             </a:r>
             <a:endParaRPr lang="en-US" sz="1300" dirty="0"/>
           </a:p>
@@ -36235,11 +35866,11 @@
             </a:avLst>
           </a:prstGeom>
           <a:solidFill>
-            <a:srgbClr val="DCFCE7"/>
-          </a:solidFill>
-          <a:ln w="12700">
-            <a:solidFill>
-              <a:srgbClr val="16A34A"/>
+            <a:srgbClr val="FEE2E2"/>
+          </a:solidFill>
+          <a:ln w="12700">
+            <a:solidFill>
+              <a:srgbClr val="DC2626"/>
             </a:solidFill>
             <a:prstDash val="solid"/>
           </a:ln>
@@ -36272,13 +35903,13 @@
             <a:r>
               <a:rPr lang="en-US" sz="1100" b="1" dirty="0">
                 <a:solidFill>
-                  <a:srgbClr val="16A34A"/>
+                  <a:srgbClr val="DC2626"/>
                 </a:solidFill>
                 <a:latin typeface="Trebuchet MS" pitchFamily="34" charset="0"/>
                 <a:ea typeface="Trebuchet MS" pitchFamily="34" charset="-122"/>
                 <a:cs typeface="Trebuchet MS" pitchFamily="34" charset="-120"/>
               </a:rPr>
-              <a:t>TRUE</a:t>
+              <a:t>FALSE</a:t>
             </a:r>
             <a:endParaRPr lang="en-US" sz="1100" dirty="0"/>
           </a:p>
@@ -36351,7 +35982,7 @@
                 <a:ea typeface="Calibri" pitchFamily="34" charset="-122"/>
                 <a:cs typeface="Calibri" pitchFamily="34" charset="-120"/>
               </a:rPr>
-              <a:t>5.  Every word that ends in the letters 'age' contains the suffix '-age', such as 'cage' and 'page'.</a:t>
+              <a:t>5.  The suffix '-age' can mean a state or process, like in the word 'storage'.</a:t>
             </a:r>
             <a:endParaRPr lang="en-US" sz="1300" dirty="0"/>
           </a:p>
@@ -36374,11 +36005,11 @@
             </a:avLst>
           </a:prstGeom>
           <a:solidFill>
-            <a:srgbClr val="FEE2E2"/>
-          </a:solidFill>
-          <a:ln w="12700">
-            <a:solidFill>
-              <a:srgbClr val="DC2626"/>
+            <a:srgbClr val="DCFCE7"/>
+          </a:solidFill>
+          <a:ln w="12700">
+            <a:solidFill>
+              <a:srgbClr val="16A34A"/>
             </a:solidFill>
             <a:prstDash val="solid"/>
           </a:ln>
@@ -36411,13 +36042,13 @@
             <a:r>
               <a:rPr lang="en-US" sz="1100" b="1" dirty="0">
                 <a:solidFill>
-                  <a:srgbClr val="DC2626"/>
+                  <a:srgbClr val="16A34A"/>
                 </a:solidFill>
                 <a:latin typeface="Trebuchet MS" pitchFamily="34" charset="0"/>
                 <a:ea typeface="Trebuchet MS" pitchFamily="34" charset="-122"/>
                 <a:cs typeface="Trebuchet MS" pitchFamily="34" charset="-120"/>
               </a:rPr>
-              <a:t>FALSE</a:t>
+              <a:t>TRUE</a:t>
             </a:r>
             <a:endParaRPr lang="en-US" sz="1100" dirty="0"/>
           </a:p>
@@ -36709,7 +36340,7 @@
                 <a:ea typeface="Calibri" pitchFamily="34" charset="-122"/>
                 <a:cs typeface="Calibri" pitchFamily="34" charset="-120"/>
               </a:rPr>
-              <a:t>Word Labs  •  wordlabs.app  •  Suffix: '-age' = state, collection, or process</a:t>
+              <a:t>Word Labs  •  wordlabs.app  •  Suffix: '-age' = state, process, or collection</a:t>
             </a:r>
             <a:endParaRPr lang="en-US" sz="800" dirty="0"/>
           </a:p>
@@ -36846,7 +36477,7 @@
                 <a:ea typeface="Trebuchet MS" pitchFamily="34" charset="-122"/>
                 <a:cs typeface="Trebuchet MS" pitchFamily="34" charset="-120"/>
               </a:rPr>
-              <a:t>state, collection, or process</a:t>
+              <a:t>state, process, or collection</a:t>
             </a:r>
             <a:endParaRPr lang="en-US" sz="2000" dirty="0"/>
           </a:p>
@@ -36990,7 +36621,7 @@
                 <a:ea typeface="Trebuchet MS" pitchFamily="34" charset="-122"/>
                 <a:cs typeface="Trebuchet MS" pitchFamily="34" charset="-120"/>
               </a:rPr>
-              <a:t>package</a:t>
+              <a:t>storage</a:t>
             </a:r>
             <a:endParaRPr lang="en-US" sz="1300" dirty="0"/>
           </a:p>
@@ -37056,7 +36687,7 @@
                 <a:ea typeface="Trebuchet MS" pitchFamily="34" charset="-122"/>
                 <a:cs typeface="Trebuchet MS" pitchFamily="34" charset="-120"/>
               </a:rPr>
-              <a:t>storage</a:t>
+              <a:t>package</a:t>
             </a:r>
             <a:endParaRPr lang="en-US" sz="1300" dirty="0"/>
           </a:p>
@@ -37122,7 +36753,7 @@
                 <a:ea typeface="Trebuchet MS" pitchFamily="34" charset="-122"/>
                 <a:cs typeface="Trebuchet MS" pitchFamily="34" charset="-120"/>
               </a:rPr>
-              <a:t>drainage</a:t>
+              <a:t>passage</a:t>
             </a:r>
             <a:endParaRPr lang="en-US" sz="1300" dirty="0"/>
           </a:p>
@@ -37254,7 +36885,7 @@
                 <a:ea typeface="Trebuchet MS" pitchFamily="34" charset="-122"/>
                 <a:cs typeface="Trebuchet MS" pitchFamily="34" charset="-120"/>
               </a:rPr>
-              <a:t>passage</a:t>
+              <a:t>coverage</a:t>
             </a:r>
             <a:endParaRPr lang="en-US" sz="1300" dirty="0"/>
           </a:p>
@@ -37320,7 +36951,7 @@
                 <a:ea typeface="Trebuchet MS" pitchFamily="34" charset="-122"/>
                 <a:cs typeface="Trebuchet MS" pitchFamily="34" charset="-120"/>
               </a:rPr>
-              <a:t>village</a:t>
+              <a:t>heritage</a:t>
             </a:r>
             <a:endParaRPr lang="en-US" sz="1300" dirty="0"/>
           </a:p>
@@ -37386,7 +37017,7 @@
                 <a:ea typeface="Trebuchet MS" pitchFamily="34" charset="-122"/>
                 <a:cs typeface="Trebuchet MS" pitchFamily="34" charset="-120"/>
               </a:rPr>
-              <a:t>courage</a:t>
+              <a:t>shortage</a:t>
             </a:r>
             <a:endParaRPr lang="en-US" sz="1300" dirty="0"/>
           </a:p>
@@ -37678,7 +37309,7 @@
                 <a:ea typeface="Calibri" pitchFamily="34" charset="-122"/>
                 <a:cs typeface="Calibri" pitchFamily="34" charset="-120"/>
               </a:rPr>
-              <a:t>Word Labs  •  wordlabs.app  •  Suffix: '-age' = state, collection, or process</a:t>
+              <a:t>Word Labs  •  wordlabs.app  •  Suffix: '-age' = state, process, or collection</a:t>
             </a:r>
             <a:endParaRPr lang="en-US" sz="800" dirty="0"/>
           </a:p>
@@ -38043,7 +37674,7 @@
                 <a:ea typeface="Trebuchet MS" pitchFamily="34" charset="-122"/>
                 <a:cs typeface="Trebuchet MS" pitchFamily="34" charset="-120"/>
               </a:rPr>
-              <a:t>pack</a:t>
+              <a:t>stor</a:t>
             </a:r>
             <a:endParaRPr lang="en-US" sz="1300" dirty="0"/>
           </a:p>
@@ -38171,7 +37802,7 @@
                 <a:ea typeface="Trebuchet MS" pitchFamily="34" charset="-122"/>
                 <a:cs typeface="Trebuchet MS" pitchFamily="34" charset="-120"/>
               </a:rPr>
-              <a:t>her-</a:t>
+              <a:t>pack-</a:t>
             </a:r>
             <a:endParaRPr lang="en-US" sz="1300" dirty="0"/>
           </a:p>
@@ -38235,7 +37866,7 @@
                 <a:ea typeface="Trebuchet MS" pitchFamily="34" charset="-122"/>
                 <a:cs typeface="Trebuchet MS" pitchFamily="34" charset="-120"/>
               </a:rPr>
-              <a:t>stor</a:t>
+              <a:t>pass</a:t>
             </a:r>
             <a:endParaRPr lang="en-US" sz="1300" dirty="0"/>
           </a:p>
@@ -38324,7 +37955,7 @@
                 <a:ea typeface="Trebuchet MS" pitchFamily="34" charset="-122"/>
                 <a:cs typeface="Trebuchet MS" pitchFamily="34" charset="-120"/>
               </a:rPr>
-              <a:t>pil-</a:t>
+              <a:t>her-</a:t>
             </a:r>
             <a:endParaRPr lang="en-US" sz="1300" dirty="0"/>
           </a:p>
@@ -38388,7 +38019,7 @@
                 <a:ea typeface="Trebuchet MS" pitchFamily="34" charset="-122"/>
                 <a:cs typeface="Trebuchet MS" pitchFamily="34" charset="-120"/>
               </a:rPr>
-              <a:t>drain</a:t>
+              <a:t>pack</a:t>
             </a:r>
             <a:endParaRPr lang="en-US" sz="1300" dirty="0"/>
           </a:p>
@@ -38477,7 +38108,7 @@
                 <a:ea typeface="Trebuchet MS" pitchFamily="34" charset="-122"/>
                 <a:cs typeface="Trebuchet MS" pitchFamily="34" charset="-120"/>
               </a:rPr>
-              <a:t>lin-</a:t>
+              <a:t>band-</a:t>
             </a:r>
             <a:endParaRPr lang="en-US" sz="1300" dirty="0"/>
           </a:p>
@@ -38630,7 +38261,7 @@
                 <a:ea typeface="Trebuchet MS" pitchFamily="34" charset="-122"/>
                 <a:cs typeface="Trebuchet MS" pitchFamily="34" charset="-120"/>
               </a:rPr>
-              <a:t>van-</a:t>
+              <a:t>pass-</a:t>
             </a:r>
             <a:endParaRPr lang="en-US" sz="1300" dirty="0"/>
           </a:p>
@@ -38694,7 +38325,7 @@
                 <a:ea typeface="Trebuchet MS" pitchFamily="34" charset="-122"/>
                 <a:cs typeface="Trebuchet MS" pitchFamily="34" charset="-120"/>
               </a:rPr>
-              <a:t>pass</a:t>
+              <a:t>cov</a:t>
             </a:r>
             <a:endParaRPr lang="en-US" sz="1300" dirty="0"/>
           </a:p>
@@ -38943,7 +38574,7 @@
                 <a:ea typeface="Trebuchet MS" pitchFamily="34" charset="-122"/>
                 <a:cs typeface="Trebuchet MS" pitchFamily="34" charset="-120"/>
               </a:rPr>
-              <a:t>pack</a:t>
+              <a:t>stor</a:t>
             </a:r>
             <a:endParaRPr lang="en-US" sz="1300" dirty="0"/>
           </a:p>
@@ -39160,7 +38791,7 @@
                 <a:ea typeface="Trebuchet MS" pitchFamily="34" charset="-122"/>
                 <a:cs typeface="Trebuchet MS" pitchFamily="34" charset="-120"/>
               </a:rPr>
-              <a:t>package</a:t>
+              <a:t>storage</a:t>
             </a:r>
             <a:endParaRPr lang="en-US" sz="1400" dirty="0"/>
           </a:p>
@@ -39452,7 +39083,7 @@
                 <a:ea typeface="Calibri" pitchFamily="34" charset="-122"/>
                 <a:cs typeface="Calibri" pitchFamily="34" charset="-120"/>
               </a:rPr>
-              <a:t>Word Labs  •  wordlabs.app  •  Suffix: '-age' = state, collection, or process</a:t>
+              <a:t>Word Labs  •  wordlabs.app  •  Suffix: '-age' = state, process, or collection</a:t>
             </a:r>
             <a:endParaRPr lang="en-US" sz="800" dirty="0"/>
           </a:p>
@@ -39564,7 +39195,7 @@
                 <a:ea typeface="Trebuchet MS" pitchFamily="34" charset="-122"/>
                 <a:cs typeface="Trebuchet MS" pitchFamily="34" charset="-120"/>
               </a:rPr>
-              <a:t>package</a:t>
+              <a:t>storage</a:t>
             </a:r>
             <a:endParaRPr lang="en-US" sz="1200" dirty="0"/>
           </a:p>
@@ -39630,7 +39261,7 @@
                 <a:ea typeface="Calibri" pitchFamily="34" charset="-122"/>
                 <a:cs typeface="Calibri" pitchFamily="34" charset="-120"/>
               </a:rPr>
-              <a:t>A narrow path or corridor that connects two places.</a:t>
+              <a:t>How much of something is included or reported on.</a:t>
             </a:r>
             <a:endParaRPr lang="en-US" sz="1200" dirty="0"/>
           </a:p>
@@ -39703,7 +39334,7 @@
                 <a:ea typeface="Trebuchet MS" pitchFamily="34" charset="-122"/>
                 <a:cs typeface="Trebuchet MS" pitchFamily="34" charset="-120"/>
               </a:rPr>
-              <a:t>storage</a:t>
+              <a:t>package</a:t>
             </a:r>
             <a:endParaRPr lang="en-US" sz="1200" dirty="0"/>
           </a:p>
@@ -39842,7 +39473,7 @@
                 <a:ea typeface="Trebuchet MS" pitchFamily="34" charset="-122"/>
                 <a:cs typeface="Trebuchet MS" pitchFamily="34" charset="-120"/>
               </a:rPr>
-              <a:t>drainage</a:t>
+              <a:t>passage</a:t>
             </a:r>
             <a:endParaRPr lang="en-US" sz="1200" dirty="0"/>
           </a:p>
@@ -39908,7 +39539,7 @@
                 <a:ea typeface="Calibri" pitchFamily="34" charset="-122"/>
                 <a:cs typeface="Calibri" pitchFamily="34" charset="-120"/>
               </a:rPr>
-              <a:t>A small town or community in the countryside.</a:t>
+              <a:t>The traditions and history passed down from past generations.</a:t>
             </a:r>
             <a:endParaRPr lang="en-US" sz="1200" dirty="0"/>
           </a:p>
@@ -40047,7 +39678,7 @@
                 <a:ea typeface="Calibri" pitchFamily="34" charset="-122"/>
                 <a:cs typeface="Calibri" pitchFamily="34" charset="-120"/>
               </a:rPr>
-              <a:t>The system that carries away water or liquid from a place.</a:t>
+              <a:t>A narrow path or walkway that connects two places.</a:t>
             </a:r>
             <a:endParaRPr lang="en-US" sz="1200" dirty="0"/>
           </a:p>
@@ -40120,7 +39751,7 @@
                 <a:ea typeface="Trebuchet MS" pitchFamily="34" charset="-122"/>
                 <a:cs typeface="Trebuchet MS" pitchFamily="34" charset="-120"/>
               </a:rPr>
-              <a:t>passage</a:t>
+              <a:t>coverage</a:t>
             </a:r>
             <a:endParaRPr lang="en-US" sz="1200" dirty="0"/>
           </a:p>
@@ -40186,7 +39817,7 @@
                 <a:ea typeface="Calibri" pitchFamily="34" charset="-122"/>
                 <a:cs typeface="Calibri" pitchFamily="34" charset="-120"/>
               </a:rPr>
-              <a:t>The strength to do something brave even when you feel scared.</a:t>
+              <a:t>When there is not enough of something that is needed.</a:t>
             </a:r>
             <a:endParaRPr lang="en-US" sz="1200" dirty="0"/>
           </a:p>
@@ -40259,7 +39890,7 @@
                 <a:ea typeface="Trebuchet MS" pitchFamily="34" charset="-122"/>
                 <a:cs typeface="Trebuchet MS" pitchFamily="34" charset="-120"/>
               </a:rPr>
-              <a:t>village</a:t>
+              <a:t>heritage</a:t>
             </a:r>
             <a:endParaRPr lang="en-US" sz="1200" dirty="0"/>
           </a:p>
@@ -40325,7 +39956,7 @@
                 <a:ea typeface="Calibri" pitchFamily="34" charset="-122"/>
                 <a:cs typeface="Calibri" pitchFamily="34" charset="-120"/>
               </a:rPr>
-              <a:t>A wrapped or boxed item that is sent or given to someone.</a:t>
+              <a:t>A place where things are kept or put away safely.</a:t>
             </a:r>
             <a:endParaRPr lang="en-US" sz="1200" dirty="0"/>
           </a:p>
@@ -40398,7 +40029,7 @@
                 <a:ea typeface="Trebuchet MS" pitchFamily="34" charset="-122"/>
                 <a:cs typeface="Trebuchet MS" pitchFamily="34" charset="-120"/>
               </a:rPr>
-              <a:t>courage</a:t>
+              <a:t>shortage</a:t>
             </a:r>
             <a:endParaRPr lang="en-US" sz="1200" dirty="0"/>
           </a:p>
@@ -40464,7 +40095,7 @@
                 <a:ea typeface="Calibri" pitchFamily="34" charset="-122"/>
                 <a:cs typeface="Calibri" pitchFamily="34" charset="-120"/>
               </a:rPr>
-              <a:t>A place or way of keeping things safe until they are needed.</a:t>
+              <a:t>A wrapped or boxed item that is sent or given to someone.</a:t>
             </a:r>
             <a:endParaRPr lang="en-US" sz="1200" dirty="0"/>
           </a:p>
@@ -40756,7 +40387,7 @@
                 <a:ea typeface="Calibri" pitchFamily="34" charset="-122"/>
                 <a:cs typeface="Calibri" pitchFamily="34" charset="-120"/>
               </a:rPr>
-              <a:t>Word Labs  •  wordlabs.app  •  Suffix: '-age' = state, collection, or process</a:t>
+              <a:t>Word Labs  •  wordlabs.app  •  Suffix: '-age' = state, process, or collection</a:t>
             </a:r>
             <a:endParaRPr lang="en-US" sz="800" dirty="0"/>
           </a:p>
@@ -40959,7 +40590,7 @@
                 <a:ea typeface="Calibri" pitchFamily="34" charset="-122"/>
                 <a:cs typeface="Calibri" pitchFamily="34" charset="-120"/>
               </a:rPr>
-              <a:t>The explorer needed great courage to cross the dark and misty swamp.</a:t>
+              <a:t>The explorer found a hidden passage leading deep into the cave.</a:t>
             </a:r>
             <a:endParaRPr lang="en-US" sz="1500" dirty="0"/>
           </a:p>
@@ -41123,7 +40754,7 @@
                 <a:ea typeface="Calibri" pitchFamily="34" charset="-122"/>
                 <a:cs typeface="Calibri" pitchFamily="34" charset="-120"/>
               </a:rPr>
-              <a:t>We put our bags in the storage room at the back of the school.</a:t>
+              <a:t>We need more storage space in the classroom for all our art supplies.</a:t>
             </a:r>
             <a:endParaRPr lang="en-US" sz="1500" dirty="0"/>
           </a:p>
@@ -41287,7 +40918,7 @@
                 <a:ea typeface="Calibri" pitchFamily="34" charset="-122"/>
                 <a:cs typeface="Calibri" pitchFamily="34" charset="-120"/>
               </a:rPr>
-              <a:t>The old village had a tiny market and a river running through it.</a:t>
+              <a:t>The nurse put a bandage on my arm after I fell off my bike.</a:t>
             </a:r>
             <a:endParaRPr lang="en-US" sz="1500" dirty="0"/>
           </a:p>
